--- a/inventario_analisis.pptx
+++ b/inventario_analisis.pptx
@@ -16,9 +16,10 @@
     <p:sldId id="264" r:id="rId10"/>
     <p:sldId id="265" r:id="rId11"/>
     <p:sldId id="266" r:id="rId12"/>
+    <p:sldId id="267" r:id="rId13"/>
   </p:sldIdLst>
   <p:notesMasterIdLst>
-    <p:notesMasterId r:id="rId13"/>
+    <p:notesMasterId r:id="rId14"/>
   </p:notesMasterIdLst>
   <p:sldSz cx="12192000" cy="6858000"/>
   <p:notesSz cx="6858000" cy="12192000"/>
@@ -852,6 +853,403 @@
           <a:p>
             <a:pPr>
               <a:defRPr sz="1100" b="0" i="0" u="none" strike="noStrike">
+                <a:solidFill>
+                  <a:srgbClr val="4B5563"/>
+                </a:solidFill>
+                <a:latin typeface="Arial"/>
+              </a:defRPr>
+            </a:pPr>
+            <a:endParaRPr lang="en-US"/>
+          </a:p>
+        </c:txPr>
+        <c:crossAx val="2094734552"/>
+        <c:crosses val="autoZero"/>
+        <c:auto val="1"/>
+        <c:lblAlgn val="ctr"/>
+        <c:noMultiLvlLbl val="1"/>
+      </c:catAx>
+      <c:valAx>
+        <c:axId val="2094734552"/>
+        <c:scaling>
+          <c:orientation val="minMax"/>
+        </c:scaling>
+        <c:delete val="0"/>
+        <c:axPos val="b"/>
+        <c:majorGridlines>
+          <c:spPr>
+            <a:ln w="6350" cap="flat">
+              <a:solidFill>
+                <a:srgbClr val="E5E7EB"/>
+              </a:solidFill>
+              <a:prstDash val="solid"/>
+              <a:round/>
+            </a:ln>
+          </c:spPr>
+        </c:majorGridlines>
+        <c:numFmt formatCode="General" sourceLinked="0"/>
+        <c:majorTickMark val="out"/>
+        <c:minorTickMark val="none"/>
+        <c:tickLblPos val="low"/>
+        <c:spPr>
+          <a:ln w="12700" cap="flat">
+            <a:solidFill>
+              <a:srgbClr val="888888"/>
+            </a:solidFill>
+            <a:prstDash val="solid"/>
+            <a:round/>
+          </a:ln>
+        </c:spPr>
+        <c:txPr>
+          <a:bodyPr/>
+          <a:lstStyle/>
+          <a:p>
+            <a:pPr>
+              <a:defRPr sz="1200" b="0" i="0" u="none" strike="noStrike">
+                <a:solidFill>
+                  <a:srgbClr val="4B5563"/>
+                </a:solidFill>
+                <a:latin typeface="Arial"/>
+              </a:defRPr>
+            </a:pPr>
+            <a:endParaRPr lang="en-US"/>
+          </a:p>
+        </c:txPr>
+        <c:crossAx val="2094734554"/>
+        <c:crosses val="autoZero"/>
+        <c:crossBetween val="between"/>
+      </c:valAx>
+      <c:spPr>
+        <a:noFill/>
+        <a:ln>
+          <a:noFill/>
+        </a:ln>
+        <a:effectLst/>
+      </c:spPr>
+    </c:plotArea>
+    <c:legend>
+      <c:legendPos val="t"/>
+      <c:overlay val="0"/>
+      <c:txPr>
+        <a:bodyPr/>
+        <a:lstStyle/>
+        <a:p>
+          <a:pPr>
+            <a:defRPr sz="1100">      </a:defRPr>
+          </a:pPr>
+          <a:endParaRPr lang="en-US"/>
+        </a:p>
+      </c:txPr>
+    </c:legend>
+    <c:plotVisOnly val="1"/>
+    <c:dispBlanksAs val="span"/>
+  </c:chart>
+  <c:spPr>
+    <a:noFill/>
+    <a:ln>
+      <a:noFill/>
+    </a:ln>
+    <a:effectLst/>
+  </c:spPr>
+  <c:externalData r:id="rId1">
+    <c:autoUpdate val="0"/>
+  </c:externalData>
+</c:chartSpace>
+</file>
+
+<file path=ppt/charts/chart3.xml><?xml version="1.0" encoding="utf-8"?>
+<c:chartSpace xmlns:c="http://schemas.openxmlformats.org/drawingml/2006/chart" xmlns:a="http://schemas.openxmlformats.org/drawingml/2006/main" xmlns:r="http://schemas.openxmlformats.org/officeDocument/2006/relationships">
+  <c:date1904 val="0"/>
+  <c:roundedCorners val="1"/>
+  <c:chart>
+    <c:autoTitleDeleted val="1"/>
+    <c:plotArea>
+      <c:layout/>
+      <c:barChart>
+        <c:barDir val="bar"/>
+        <c:grouping val="clustered"/>
+        <c:varyColors val="0"/>
+        <c:ser>
+          <c:idx val="0"/>
+          <c:order val="0"/>
+          <c:tx>
+            <c:strRef>
+              <c:f>Sheet1!$B$1</c:f>
+              <c:strCache>
+                <c:ptCount val="1"/>
+                <c:pt idx="0">
+                  <c:v>Mar 2026</c:v>
+                </c:pt>
+              </c:strCache>
+            </c:strRef>
+          </c:tx>
+          <c:spPr>
+            <a:solidFill>
+              <a:srgbClr val="C0392B"/>
+            </a:solidFill>
+            <a:effectLst/>
+          </c:spPr>
+          <c:invertIfNegative val="0"/>
+          <c:dLbls>
+            <c:numFmt formatCode="#,##0" sourceLinked="0"/>
+            <c:txPr>
+              <a:bodyPr/>
+              <a:lstStyle/>
+              <a:p>
+                <a:pPr>
+                  <a:defRPr b="0" i="0" strike="noStrike" sz="1200" u="none">
+                    <a:solidFill>
+                      <a:srgbClr val="000000"/>
+                    </a:solidFill>
+                    <a:latin typeface="Arial"/>
+                  </a:defRPr>
+                </a:pPr>
+              </a:p>
+            </c:txPr>
+            <c:showLegendKey val="0"/>
+            <c:showVal val="0"/>
+            <c:showCatName val="0"/>
+            <c:showSerName val="0"/>
+            <c:showPercent val="0"/>
+            <c:showBubbleSize val="0"/>
+            <c:showLeaderLines val="0"/>
+          </c:dLbls>
+          <c:cat>
+            <c:multiLvlStrRef>
+              <c:f>Sheet1!$A$2:$A$9</c:f>
+              <c:multiLvlStrCache>
+                <c:ptCount val="8"/>
+                <c:lvl>
+                  <c:pt idx="0">
+                    <c:v>Cartelería</c:v>
+                  </c:pt>
+                  <c:pt idx="1">
+                    <c:v>Sublimación</c:v>
+                  </c:pt>
+                  <c:pt idx="2">
+                    <c:v>Vinilos p/ Vidrios</c:v>
+                  </c:pt>
+                  <c:pt idx="3">
+                    <c:v>Vinilos Textiles</c:v>
+                  </c:pt>
+                  <c:pt idx="4">
+                    <c:v>Papelería</c:v>
+                  </c:pt>
+                  <c:pt idx="5">
+                    <c:v>Vinilos de Corte</c:v>
+                  </c:pt>
+                  <c:pt idx="6">
+                    <c:v>Kraft</c:v>
+                  </c:pt>
+                  <c:pt idx="7">
+                    <c:v>Automotor</c:v>
+                  </c:pt>
+                </c:lvl>
+              </c:multiLvlStrCache>
+            </c:multiLvlStrRef>
+          </c:cat>
+          <c:val>
+            <c:numRef>
+              <c:f>Sheet1!$B$2:$B$9</c:f>
+              <c:numCache>
+                <c:formatCode>General</c:formatCode>
+                <c:ptCount val="8"/>
+                <c:pt idx="0">
+                  <c:v>811516</c:v>
+                </c:pt>
+                <c:pt idx="1">
+                  <c:v>423920</c:v>
+                </c:pt>
+                <c:pt idx="2">
+                  <c:v>47408</c:v>
+                </c:pt>
+                <c:pt idx="3">
+                  <c:v>206231</c:v>
+                </c:pt>
+                <c:pt idx="4">
+                  <c:v>22658</c:v>
+                </c:pt>
+                <c:pt idx="5">
+                  <c:v>147668</c:v>
+                </c:pt>
+                <c:pt idx="6">
+                  <c:v>76530</c:v>
+                </c:pt>
+                <c:pt idx="7">
+                  <c:v>27871</c:v>
+                </c:pt>
+              </c:numCache>
+            </c:numRef>
+          </c:val>
+        </c:ser>
+        <c:ser>
+          <c:idx val="1"/>
+          <c:order val="1"/>
+          <c:tx>
+            <c:strRef>
+              <c:f>Sheet1!$C$1</c:f>
+              <c:strCache>
+                <c:ptCount val="1"/>
+                <c:pt idx="0">
+                  <c:v>Sep 2026</c:v>
+                </c:pt>
+              </c:strCache>
+            </c:strRef>
+          </c:tx>
+          <c:spPr>
+            <a:solidFill>
+              <a:srgbClr val="22A45D"/>
+            </a:solidFill>
+            <a:effectLst/>
+          </c:spPr>
+          <c:invertIfNegative val="0"/>
+          <c:dLbls>
+            <c:numFmt formatCode="#,##0" sourceLinked="0"/>
+            <c:txPr>
+              <a:bodyPr/>
+              <a:lstStyle/>
+              <a:p>
+                <a:pPr>
+                  <a:defRPr b="0" i="0" strike="noStrike" sz="1200" u="none">
+                    <a:solidFill>
+                      <a:srgbClr val="000000"/>
+                    </a:solidFill>
+                    <a:latin typeface="Arial"/>
+                  </a:defRPr>
+                </a:pPr>
+              </a:p>
+            </c:txPr>
+            <c:showLegendKey val="0"/>
+            <c:showVal val="0"/>
+            <c:showCatName val="0"/>
+            <c:showSerName val="0"/>
+            <c:showPercent val="0"/>
+            <c:showBubbleSize val="0"/>
+            <c:showLeaderLines val="0"/>
+          </c:dLbls>
+          <c:cat>
+            <c:multiLvlStrRef>
+              <c:f>Sheet1!$A$2:$A$9</c:f>
+              <c:multiLvlStrCache>
+                <c:ptCount val="8"/>
+                <c:lvl>
+                  <c:pt idx="0">
+                    <c:v>Cartelería</c:v>
+                  </c:pt>
+                  <c:pt idx="1">
+                    <c:v>Sublimación</c:v>
+                  </c:pt>
+                  <c:pt idx="2">
+                    <c:v>Vinilos p/ Vidrios</c:v>
+                  </c:pt>
+                  <c:pt idx="3">
+                    <c:v>Vinilos Textiles</c:v>
+                  </c:pt>
+                  <c:pt idx="4">
+                    <c:v>Papelería</c:v>
+                  </c:pt>
+                  <c:pt idx="5">
+                    <c:v>Vinilos de Corte</c:v>
+                  </c:pt>
+                  <c:pt idx="6">
+                    <c:v>Kraft</c:v>
+                  </c:pt>
+                  <c:pt idx="7">
+                    <c:v>Automotor</c:v>
+                  </c:pt>
+                </c:lvl>
+              </c:multiLvlStrCache>
+            </c:multiLvlStrRef>
+          </c:cat>
+          <c:val>
+            <c:numRef>
+              <c:f>Sheet1!$C$2:$C$9</c:f>
+              <c:numCache>
+                <c:formatCode>General</c:formatCode>
+                <c:ptCount val="8"/>
+                <c:pt idx="0">
+                  <c:v>455544</c:v>
+                </c:pt>
+                <c:pt idx="1">
+                  <c:v>403125</c:v>
+                </c:pt>
+                <c:pt idx="2">
+                  <c:v>31601</c:v>
+                </c:pt>
+                <c:pt idx="3">
+                  <c:v>192116</c:v>
+                </c:pt>
+                <c:pt idx="4">
+                  <c:v>12313</c:v>
+                </c:pt>
+                <c:pt idx="5">
+                  <c:v>139137</c:v>
+                </c:pt>
+                <c:pt idx="6">
+                  <c:v>71086</c:v>
+                </c:pt>
+                <c:pt idx="7">
+                  <c:v>23986</c:v>
+                </c:pt>
+              </c:numCache>
+            </c:numRef>
+          </c:val>
+        </c:ser>
+        <c:dLbls>
+          <c:numFmt formatCode="#,##0" sourceLinked="0"/>
+          <c:txPr>
+            <a:bodyPr/>
+            <a:lstStyle/>
+            <a:p>
+              <a:pPr>
+                <a:defRPr b="0" i="0" strike="noStrike" sz="1200" u="none">
+                  <a:solidFill>
+                    <a:srgbClr val="000000"/>
+                  </a:solidFill>
+                  <a:latin typeface="Arial"/>
+                </a:defRPr>
+              </a:pPr>
+            </a:p>
+          </c:txPr>
+          <c:showLegendKey val="0"/>
+          <c:showVal val="0"/>
+          <c:showCatName val="0"/>
+          <c:showSerName val="0"/>
+          <c:showPercent val="0"/>
+          <c:showBubbleSize val="0"/>
+          <c:showLeaderLines val="0"/>
+        </c:dLbls>
+        <c:gapWidth val="150"/>
+        <c:overlap val="0"/>
+        <c:axId val="2094734554"/>
+        <c:axId val="2094734552"/>
+        <c:axId val="2094734556"/>
+      </c:barChart>
+      <c:catAx>
+        <c:axId val="2094734554"/>
+        <c:scaling>
+          <c:orientation val="minMax"/>
+        </c:scaling>
+        <c:delete val="0"/>
+        <c:axPos val="l"/>
+        <c:numFmt formatCode="General" sourceLinked="1"/>
+        <c:majorTickMark val="out"/>
+        <c:minorTickMark val="none"/>
+        <c:tickLblPos val="nextTo"/>
+        <c:spPr>
+          <a:ln w="12700" cap="flat">
+            <a:solidFill>
+              <a:srgbClr val="888888"/>
+            </a:solidFill>
+            <a:prstDash val="solid"/>
+            <a:round/>
+          </a:ln>
+        </c:spPr>
+        <c:txPr>
+          <a:bodyPr/>
+          <a:lstStyle/>
+          <a:p>
+            <a:pPr>
+              <a:defRPr sz="1000" b="0" i="0" u="none" strike="noStrike">
                 <a:solidFill>
                   <a:srgbClr val="4B5563"/>
                 </a:solidFill>
@@ -1550,6 +1948,94 @@
             <a:fld id="{F7021451-1387-4CA6-816F-3879F97B5CBC}" type="slidenum">
               <a:rPr lang="en-US"/>
               <a:t>11</a:t>
+            </a:fld>
+            <a:endParaRPr lang="en-US"/>
+          </a:p>
+        </p:txBody>
+      </p:sp>
+    </p:spTree>
+    <p:extLst>
+      <p:ext uri="{BB962C8B-B14F-4D97-AF65-F5344CB8AC3E}">
+        <p14:creationId xmlns:p14="http://schemas.microsoft.com/office/powerpoint/2010/main" val="1024086991"/>
+      </p:ext>
+    </p:extLst>
+  </p:cSld>
+  <p:clrMapOvr>
+    <a:masterClrMapping/>
+  </p:clrMapOvr>
+</p:notes>
+</file>
+
+<file path=ppt/notesSlides/notesSlide12.xml><?xml version="1.0" encoding="utf-8"?>
+<p:notes xmlns:a="http://schemas.openxmlformats.org/drawingml/2006/main" xmlns:r="http://schemas.openxmlformats.org/officeDocument/2006/relationships" xmlns:p="http://schemas.openxmlformats.org/presentationml/2006/main">
+  <p:cSld>
+    <p:spTree>
+      <p:nvGrpSpPr>
+        <p:cNvPr id="1" name=""/>
+        <p:cNvGrpSpPr/>
+        <p:nvPr/>
+      </p:nvGrpSpPr>
+      <p:grpSpPr>
+        <a:xfrm>
+          <a:off x="0" y="0"/>
+          <a:ext cx="0" cy="0"/>
+          <a:chOff x="0" y="0"/>
+          <a:chExt cx="0" cy="0"/>
+        </a:xfrm>
+      </p:grpSpPr>
+      <p:sp>
+        <p:nvSpPr>
+          <p:cNvPr id="2" name="Slide Image Placeholder 1"/>
+          <p:cNvSpPr>
+            <a:spLocks noGrp="1" noRot="1" noChangeAspect="1"/>
+          </p:cNvSpPr>
+          <p:nvPr>
+            <p:ph type="sldImg"/>
+          </p:nvPr>
+        </p:nvSpPr>
+        <p:spPr/>
+      </p:sp>
+      <p:sp>
+        <p:nvSpPr>
+          <p:cNvPr id="3" name="Notes Placeholder 2"/>
+          <p:cNvSpPr>
+            <a:spLocks noGrp="1"/>
+          </p:cNvSpPr>
+          <p:nvPr>
+            <p:ph type="body" idx="1"/>
+          </p:nvPr>
+        </p:nvSpPr>
+        <p:spPr/>
+        <p:txBody>
+          <a:bodyPr/>
+          <a:lstStyle/>
+          <a:p>
+            <a:r>
+              <a:rPr lang="en-US" dirty="0"/>
+              <a:t/>
+            </a:r>
+            <a:endParaRPr lang="en-US" dirty="0"/>
+          </a:p>
+        </p:txBody>
+      </p:sp>
+      <p:sp>
+        <p:nvSpPr>
+          <p:cNvPr id="4" name="Slide Number Placeholder 3"/>
+          <p:cNvSpPr>
+            <a:spLocks noGrp="1"/>
+          </p:cNvSpPr>
+          <p:nvPr>
+            <p:ph type="sldNum" sz="quarter" idx="10"/>
+          </p:nvPr>
+        </p:nvSpPr>
+        <p:spPr/>
+        <p:txBody>
+          <a:bodyPr/>
+          <a:lstStyle/>
+          <a:p>
+            <a:fld id="{F7021451-1387-4CA6-816F-3879F97B5CBC}" type="slidenum">
+              <a:rPr lang="en-US"/>
+              <a:t>12</a:t>
             </a:fld>
             <a:endParaRPr lang="en-US"/>
           </a:p>
@@ -3043,6 +3529,908 @@
                 <a:ea typeface="Cambria" pitchFamily="34" charset="-122"/>
                 <a:cs typeface="Cambria" pitchFamily="34" charset="-120"/>
               </a:rPr>
+              <a:t>Stock saludable — activos y recientes</a:t>
+            </a:r>
+            <a:endParaRPr lang="en-US" sz="3000" dirty="0"/>
+          </a:p>
+        </p:txBody>
+      </p:sp>
+      <p:sp>
+        <p:nvSpPr>
+          <p:cNvPr id="3" name="Shape 1"/>
+          <p:cNvSpPr/>
+          <p:nvPr/>
+        </p:nvSpPr>
+        <p:spPr>
+          <a:xfrm>
+            <a:off x="457200" y="914400"/>
+            <a:ext cx="3474720" cy="1645920"/>
+          </a:xfrm>
+          <a:prstGeom prst="roundRect">
+            <a:avLst>
+              <a:gd name="adj" fmla="val 3889"/>
+            </a:avLst>
+          </a:prstGeom>
+          <a:solidFill>
+            <a:srgbClr val="FFFFFF"/>
+          </a:solidFill>
+          <a:ln w="12700">
+            <a:solidFill>
+              <a:srgbClr val="E5E7EB"/>
+            </a:solidFill>
+            <a:prstDash val="solid"/>
+          </a:ln>
+        </p:spPr>
+      </p:sp>
+      <p:sp>
+        <p:nvSpPr>
+          <p:cNvPr id="4" name="Shape 2"/>
+          <p:cNvSpPr/>
+          <p:nvPr/>
+        </p:nvSpPr>
+        <p:spPr>
+          <a:xfrm>
+            <a:off x="457200" y="914400"/>
+            <a:ext cx="64008" cy="1645920"/>
+          </a:xfrm>
+          <a:prstGeom prst="rect">
+            <a:avLst/>
+          </a:prstGeom>
+          <a:solidFill>
+            <a:srgbClr val="22A45D"/>
+          </a:solidFill>
+          <a:ln w="12700">
+            <a:solidFill>
+              <a:srgbClr val="22A45D"/>
+            </a:solidFill>
+            <a:prstDash val="solid"/>
+          </a:ln>
+        </p:spPr>
+      </p:sp>
+      <p:sp>
+        <p:nvSpPr>
+          <p:cNvPr id="5" name="Text 3"/>
+          <p:cNvSpPr txBox="1"/>
+          <p:nvPr/>
+        </p:nvSpPr>
+        <p:spPr>
+          <a:xfrm>
+            <a:off x="621792" y="1024128"/>
+            <a:ext cx="3218688" cy="855878"/>
+          </a:xfrm>
+          <a:prstGeom prst="rect">
+            <a:avLst/>
+          </a:prstGeom>
+          <a:noFill/>
+          <a:ln/>
+        </p:spPr>
+        <p:txBody>
+          <a:bodyPr wrap="square" rtlCol="0" anchor="ctr"/>
+          <a:lstStyle/>
+          <a:p>
+            <a:pPr algn="ctr" indent="0" marL="0">
+              <a:buNone/>
+            </a:pPr>
+            <a:r>
+              <a:rPr lang="en-US" sz="2600" b="1" dirty="0">
+                <a:solidFill>
+                  <a:srgbClr val="1B2E5E"/>
+                </a:solidFill>
+                <a:latin typeface="Cambria" pitchFamily="34" charset="0"/>
+                <a:ea typeface="Cambria" pitchFamily="34" charset="-122"/>
+                <a:cs typeface="Cambria" pitchFamily="34" charset="-120"/>
+              </a:rPr>
+              <a:t>$54K</a:t>
+            </a:r>
+            <a:endParaRPr lang="en-US" sz="2600" dirty="0"/>
+          </a:p>
+        </p:txBody>
+      </p:sp>
+      <p:sp>
+        <p:nvSpPr>
+          <p:cNvPr id="6" name="Text 4"/>
+          <p:cNvSpPr txBox="1"/>
+          <p:nvPr/>
+        </p:nvSpPr>
+        <p:spPr>
+          <a:xfrm>
+            <a:off x="566928" y="1869034"/>
+            <a:ext cx="3273552" cy="691286"/>
+          </a:xfrm>
+          <a:prstGeom prst="rect">
+            <a:avLst/>
+          </a:prstGeom>
+          <a:noFill/>
+          <a:ln/>
+        </p:spPr>
+        <p:txBody>
+          <a:bodyPr wrap="square" rtlCol="0" anchor="ctr"/>
+          <a:lstStyle/>
+          <a:p>
+            <a:pPr algn="ctr" indent="0" marL="0">
+              <a:buNone/>
+            </a:pPr>
+            <a:r>
+              <a:rPr lang="en-US" sz="1000" dirty="0">
+                <a:solidFill>
+                  <a:srgbClr val="4B5563"/>
+                </a:solidFill>
+                <a:latin typeface="Calibri" pitchFamily="34" charset="0"/>
+                <a:ea typeface="Calibri" pitchFamily="34" charset="-122"/>
+                <a:cs typeface="Calibri" pitchFamily="34" charset="-120"/>
+              </a:rPr>
+              <a:t>Comprar · 67 SKUs</a:t>
+            </a:r>
+            <a:endParaRPr lang="en-US" sz="1000" dirty="0"/>
+          </a:p>
+          <a:p>
+            <a:pPr algn="ctr" indent="0" marL="0">
+              <a:buNone/>
+            </a:pPr>
+            <a:r>
+              <a:rPr lang="en-US" sz="1000" dirty="0">
+                <a:solidFill>
+                  <a:srgbClr val="4B5563"/>
+                </a:solidFill>
+                <a:latin typeface="Calibri" pitchFamily="34" charset="0"/>
+                <a:ea typeface="Calibri" pitchFamily="34" charset="-122"/>
+                <a:cs typeface="Calibri" pitchFamily="34" charset="-120"/>
+              </a:rPr>
+              <a:t>Margen prom. 46.5%</a:t>
+            </a:r>
+            <a:endParaRPr lang="en-US" sz="1000" dirty="0"/>
+          </a:p>
+        </p:txBody>
+      </p:sp>
+      <p:sp>
+        <p:nvSpPr>
+          <p:cNvPr id="7" name="Shape 5"/>
+          <p:cNvSpPr/>
+          <p:nvPr/>
+        </p:nvSpPr>
+        <p:spPr>
+          <a:xfrm>
+            <a:off x="4206240" y="914400"/>
+            <a:ext cx="3474720" cy="1645920"/>
+          </a:xfrm>
+          <a:prstGeom prst="roundRect">
+            <a:avLst>
+              <a:gd name="adj" fmla="val 3889"/>
+            </a:avLst>
+          </a:prstGeom>
+          <a:solidFill>
+            <a:srgbClr val="FFFFFF"/>
+          </a:solidFill>
+          <a:ln w="12700">
+            <a:solidFill>
+              <a:srgbClr val="E5E7EB"/>
+            </a:solidFill>
+            <a:prstDash val="solid"/>
+          </a:ln>
+        </p:spPr>
+      </p:sp>
+      <p:sp>
+        <p:nvSpPr>
+          <p:cNvPr id="8" name="Shape 6"/>
+          <p:cNvSpPr/>
+          <p:nvPr/>
+        </p:nvSpPr>
+        <p:spPr>
+          <a:xfrm>
+            <a:off x="4206240" y="914400"/>
+            <a:ext cx="64008" cy="1645920"/>
+          </a:xfrm>
+          <a:prstGeom prst="rect">
+            <a:avLst/>
+          </a:prstGeom>
+          <a:solidFill>
+            <a:srgbClr val="3B7DD8"/>
+          </a:solidFill>
+          <a:ln w="12700">
+            <a:solidFill>
+              <a:srgbClr val="3B7DD8"/>
+            </a:solidFill>
+            <a:prstDash val="solid"/>
+          </a:ln>
+        </p:spPr>
+      </p:sp>
+      <p:sp>
+        <p:nvSpPr>
+          <p:cNvPr id="9" name="Text 7"/>
+          <p:cNvSpPr txBox="1"/>
+          <p:nvPr/>
+        </p:nvSpPr>
+        <p:spPr>
+          <a:xfrm>
+            <a:off x="4370832" y="1024128"/>
+            <a:ext cx="3218688" cy="855878"/>
+          </a:xfrm>
+          <a:prstGeom prst="rect">
+            <a:avLst/>
+          </a:prstGeom>
+          <a:noFill/>
+          <a:ln/>
+        </p:spPr>
+        <p:txBody>
+          <a:bodyPr wrap="square" rtlCol="0" anchor="ctr"/>
+          <a:lstStyle/>
+          <a:p>
+            <a:pPr algn="ctr" indent="0" marL="0">
+              <a:buNone/>
+            </a:pPr>
+            <a:r>
+              <a:rPr lang="en-US" sz="2600" b="1" dirty="0">
+                <a:solidFill>
+                  <a:srgbClr val="1B2E5E"/>
+                </a:solidFill>
+                <a:latin typeface="Cambria" pitchFamily="34" charset="0"/>
+                <a:ea typeface="Cambria" pitchFamily="34" charset="-122"/>
+                <a:cs typeface="Cambria" pitchFamily="34" charset="-120"/>
+              </a:rPr>
+              <a:t>$339K</a:t>
+            </a:r>
+            <a:endParaRPr lang="en-US" sz="2600" dirty="0"/>
+          </a:p>
+        </p:txBody>
+      </p:sp>
+      <p:sp>
+        <p:nvSpPr>
+          <p:cNvPr id="10" name="Text 8"/>
+          <p:cNvSpPr txBox="1"/>
+          <p:nvPr/>
+        </p:nvSpPr>
+        <p:spPr>
+          <a:xfrm>
+            <a:off x="4315968" y="1869034"/>
+            <a:ext cx="3273552" cy="691286"/>
+          </a:xfrm>
+          <a:prstGeom prst="rect">
+            <a:avLst/>
+          </a:prstGeom>
+          <a:noFill/>
+          <a:ln/>
+        </p:spPr>
+        <p:txBody>
+          <a:bodyPr wrap="square" rtlCol="0" anchor="ctr"/>
+          <a:lstStyle/>
+          <a:p>
+            <a:pPr algn="ctr" indent="0" marL="0">
+              <a:buNone/>
+            </a:pPr>
+            <a:r>
+              <a:rPr lang="en-US" sz="1000" dirty="0">
+                <a:solidFill>
+                  <a:srgbClr val="4B5563"/>
+                </a:solidFill>
+                <a:latin typeface="Calibri" pitchFamily="34" charset="0"/>
+                <a:ea typeface="Calibri" pitchFamily="34" charset="-122"/>
+                <a:cs typeface="Calibri" pitchFamily="34" charset="-120"/>
+              </a:rPr>
+              <a:t>Recien ingresado · 26 SKUs</a:t>
+            </a:r>
+            <a:endParaRPr lang="en-US" sz="1000" dirty="0"/>
+          </a:p>
+          <a:p>
+            <a:pPr algn="ctr" indent="0" marL="0">
+              <a:buNone/>
+            </a:pPr>
+            <a:r>
+              <a:rPr lang="en-US" sz="1000" dirty="0">
+                <a:solidFill>
+                  <a:srgbClr val="4B5563"/>
+                </a:solidFill>
+                <a:latin typeface="Calibri" pitchFamily="34" charset="0"/>
+                <a:ea typeface="Calibri" pitchFamily="34" charset="-122"/>
+                <a:cs typeface="Calibri" pitchFamily="34" charset="-120"/>
+              </a:rPr>
+              <a:t>Margen prom. 46.3%</a:t>
+            </a:r>
+            <a:endParaRPr lang="en-US" sz="1000" dirty="0"/>
+          </a:p>
+        </p:txBody>
+      </p:sp>
+      <p:sp>
+        <p:nvSpPr>
+          <p:cNvPr id="11" name="Shape 9"/>
+          <p:cNvSpPr/>
+          <p:nvPr/>
+        </p:nvSpPr>
+        <p:spPr>
+          <a:xfrm>
+            <a:off x="7955280" y="914400"/>
+            <a:ext cx="3749040" cy="1645920"/>
+          </a:xfrm>
+          <a:prstGeom prst="roundRect">
+            <a:avLst>
+              <a:gd name="adj" fmla="val 3889"/>
+            </a:avLst>
+          </a:prstGeom>
+          <a:solidFill>
+            <a:srgbClr val="FFFFFF"/>
+          </a:solidFill>
+          <a:ln w="12700">
+            <a:solidFill>
+              <a:srgbClr val="E5E7EB"/>
+            </a:solidFill>
+            <a:prstDash val="solid"/>
+          </a:ln>
+        </p:spPr>
+      </p:sp>
+      <p:sp>
+        <p:nvSpPr>
+          <p:cNvPr id="12" name="Shape 10"/>
+          <p:cNvSpPr/>
+          <p:nvPr/>
+        </p:nvSpPr>
+        <p:spPr>
+          <a:xfrm>
+            <a:off x="7955280" y="914400"/>
+            <a:ext cx="64008" cy="1645920"/>
+          </a:xfrm>
+          <a:prstGeom prst="rect">
+            <a:avLst/>
+          </a:prstGeom>
+          <a:solidFill>
+            <a:srgbClr val="7C3AED"/>
+          </a:solidFill>
+          <a:ln w="12700">
+            <a:solidFill>
+              <a:srgbClr val="7C3AED"/>
+            </a:solidFill>
+            <a:prstDash val="solid"/>
+          </a:ln>
+        </p:spPr>
+      </p:sp>
+      <p:sp>
+        <p:nvSpPr>
+          <p:cNvPr id="13" name="Text 11"/>
+          <p:cNvSpPr txBox="1"/>
+          <p:nvPr/>
+        </p:nvSpPr>
+        <p:spPr>
+          <a:xfrm>
+            <a:off x="8119872" y="1024128"/>
+            <a:ext cx="3493008" cy="855878"/>
+          </a:xfrm>
+          <a:prstGeom prst="rect">
+            <a:avLst/>
+          </a:prstGeom>
+          <a:noFill/>
+          <a:ln/>
+        </p:spPr>
+        <p:txBody>
+          <a:bodyPr wrap="square" rtlCol="0" anchor="ctr"/>
+          <a:lstStyle/>
+          <a:p>
+            <a:pPr algn="ctr" indent="0" marL="0">
+              <a:buNone/>
+            </a:pPr>
+            <a:r>
+              <a:rPr lang="en-US" sz="2600" b="1" dirty="0">
+                <a:solidFill>
+                  <a:srgbClr val="1B2E5E"/>
+                </a:solidFill>
+                <a:latin typeface="Cambria" pitchFamily="34" charset="0"/>
+                <a:ea typeface="Cambria" pitchFamily="34" charset="-122"/>
+                <a:cs typeface="Cambria" pitchFamily="34" charset="-120"/>
+              </a:rPr>
+              <a:t>$102K</a:t>
+            </a:r>
+            <a:endParaRPr lang="en-US" sz="2600" dirty="0"/>
+          </a:p>
+        </p:txBody>
+      </p:sp>
+      <p:sp>
+        <p:nvSpPr>
+          <p:cNvPr id="14" name="Text 12"/>
+          <p:cNvSpPr txBox="1"/>
+          <p:nvPr/>
+        </p:nvSpPr>
+        <p:spPr>
+          <a:xfrm>
+            <a:off x="8065008" y="1869034"/>
+            <a:ext cx="3547872" cy="691286"/>
+          </a:xfrm>
+          <a:prstGeom prst="rect">
+            <a:avLst/>
+          </a:prstGeom>
+          <a:noFill/>
+          <a:ln/>
+        </p:spPr>
+        <p:txBody>
+          <a:bodyPr wrap="square" rtlCol="0" anchor="ctr"/>
+          <a:lstStyle/>
+          <a:p>
+            <a:pPr algn="ctr" indent="0" marL="0">
+              <a:buNone/>
+            </a:pPr>
+            <a:r>
+              <a:rPr lang="en-US" sz="1000" dirty="0">
+                <a:solidFill>
+                  <a:srgbClr val="4B5563"/>
+                </a:solidFill>
+                <a:latin typeface="Calibri" pitchFamily="34" charset="0"/>
+                <a:ea typeface="Calibri" pitchFamily="34" charset="-122"/>
+                <a:cs typeface="Calibri" pitchFamily="34" charset="-120"/>
+              </a:rPr>
+              <a:t>Tiene pedido · 20 SKUs</a:t>
+            </a:r>
+            <a:endParaRPr lang="en-US" sz="1000" dirty="0"/>
+          </a:p>
+          <a:p>
+            <a:pPr algn="ctr" indent="0" marL="0">
+              <a:buNone/>
+            </a:pPr>
+            <a:r>
+              <a:rPr lang="en-US" sz="1000" dirty="0">
+                <a:solidFill>
+                  <a:srgbClr val="4B5563"/>
+                </a:solidFill>
+                <a:latin typeface="Calibri" pitchFamily="34" charset="0"/>
+                <a:ea typeface="Calibri" pitchFamily="34" charset="-122"/>
+                <a:cs typeface="Calibri" pitchFamily="34" charset="-120"/>
+              </a:rPr>
+              <a:t>Margen prom. 36.1%</a:t>
+            </a:r>
+            <a:endParaRPr lang="en-US" sz="1000" dirty="0"/>
+          </a:p>
+        </p:txBody>
+      </p:sp>
+      <p:sp>
+        <p:nvSpPr>
+          <p:cNvPr id="15" name="Shape 13"/>
+          <p:cNvSpPr/>
+          <p:nvPr/>
+        </p:nvSpPr>
+        <p:spPr>
+          <a:xfrm>
+            <a:off x="457200" y="2788920"/>
+            <a:ext cx="3474720" cy="3474720"/>
+          </a:xfrm>
+          <a:prstGeom prst="roundRect">
+            <a:avLst>
+              <a:gd name="adj" fmla="val 1842"/>
+            </a:avLst>
+          </a:prstGeom>
+          <a:solidFill>
+            <a:srgbClr val="FFFFFF"/>
+          </a:solidFill>
+          <a:ln w="12700">
+            <a:solidFill>
+              <a:srgbClr val="E5E7EB"/>
+            </a:solidFill>
+            <a:prstDash val="solid"/>
+          </a:ln>
+        </p:spPr>
+      </p:sp>
+      <p:sp>
+        <p:nvSpPr>
+          <p:cNvPr id="16" name="Shape 14"/>
+          <p:cNvSpPr/>
+          <p:nvPr/>
+        </p:nvSpPr>
+        <p:spPr>
+          <a:xfrm>
+            <a:off x="457200" y="2788920"/>
+            <a:ext cx="64008" cy="3474720"/>
+          </a:xfrm>
+          <a:prstGeom prst="rect">
+            <a:avLst/>
+          </a:prstGeom>
+          <a:solidFill>
+            <a:srgbClr val="22A45D"/>
+          </a:solidFill>
+          <a:ln w="12700">
+            <a:solidFill>
+              <a:srgbClr val="22A45D"/>
+            </a:solidFill>
+            <a:prstDash val="solid"/>
+          </a:ln>
+        </p:spPr>
+      </p:sp>
+      <p:sp>
+        <p:nvSpPr>
+          <p:cNvPr id="17" name="Text 15"/>
+          <p:cNvSpPr txBox="1"/>
+          <p:nvPr/>
+        </p:nvSpPr>
+        <p:spPr>
+          <a:xfrm>
+            <a:off x="640080" y="2926080"/>
+            <a:ext cx="3200400" cy="411480"/>
+          </a:xfrm>
+          <a:prstGeom prst="rect">
+            <a:avLst/>
+          </a:prstGeom>
+          <a:noFill/>
+          <a:ln/>
+        </p:spPr>
+        <p:txBody>
+          <a:bodyPr wrap="square" rtlCol="0" anchor="ctr"/>
+          <a:lstStyle/>
+          <a:p>
+            <a:pPr indent="0" marL="0">
+              <a:buNone/>
+            </a:pPr>
+            <a:r>
+              <a:rPr lang="en-US" sz="1300" b="1" dirty="0">
+                <a:solidFill>
+                  <a:srgbClr val="22A45D"/>
+                </a:solidFill>
+                <a:latin typeface="Calibri" pitchFamily="34" charset="0"/>
+                <a:ea typeface="Calibri" pitchFamily="34" charset="-122"/>
+                <a:cs typeface="Calibri" pitchFamily="34" charset="-120"/>
+              </a:rPr>
+              <a:t>COMPRAR</a:t>
+            </a:r>
+            <a:endParaRPr lang="en-US" sz="1300" dirty="0"/>
+          </a:p>
+        </p:txBody>
+      </p:sp>
+      <p:sp>
+        <p:nvSpPr>
+          <p:cNvPr id="18" name="Text 16"/>
+          <p:cNvSpPr txBox="1"/>
+          <p:nvPr/>
+        </p:nvSpPr>
+        <p:spPr>
+          <a:xfrm>
+            <a:off x="621792" y="3401568"/>
+            <a:ext cx="3200400" cy="2651760"/>
+          </a:xfrm>
+          <a:prstGeom prst="rect">
+            <a:avLst/>
+          </a:prstGeom>
+          <a:noFill/>
+          <a:ln/>
+        </p:spPr>
+        <p:txBody>
+          <a:bodyPr wrap="square" rtlCol="0" anchor="ctr"/>
+          <a:lstStyle/>
+          <a:p>
+            <a:pPr indent="0" marL="0">
+              <a:buNone/>
+            </a:pPr>
+            <a:r>
+              <a:rPr lang="en-US" sz="1100" dirty="0">
+                <a:solidFill>
+                  <a:srgbClr val="4B5563"/>
+                </a:solidFill>
+                <a:latin typeface="Calibri" pitchFamily="34" charset="0"/>
+                <a:ea typeface="Calibri" pitchFamily="34" charset="-122"/>
+                <a:cs typeface="Calibri" pitchFamily="34" charset="-120"/>
+              </a:rPr>
+              <a:t>Productos de mayor rotacion. El stock actual dura menos de 180 dias. Hay que reponer para no perder ventas. Son los de mejor margen del portfolio.</a:t>
+            </a:r>
+            <a:endParaRPr lang="en-US" sz="1100" dirty="0"/>
+          </a:p>
+        </p:txBody>
+      </p:sp>
+      <p:sp>
+        <p:nvSpPr>
+          <p:cNvPr id="19" name="Shape 17"/>
+          <p:cNvSpPr/>
+          <p:nvPr/>
+        </p:nvSpPr>
+        <p:spPr>
+          <a:xfrm>
+            <a:off x="4206240" y="2788920"/>
+            <a:ext cx="3474720" cy="3474720"/>
+          </a:xfrm>
+          <a:prstGeom prst="roundRect">
+            <a:avLst>
+              <a:gd name="adj" fmla="val 1842"/>
+            </a:avLst>
+          </a:prstGeom>
+          <a:solidFill>
+            <a:srgbClr val="FFFFFF"/>
+          </a:solidFill>
+          <a:ln w="12700">
+            <a:solidFill>
+              <a:srgbClr val="E5E7EB"/>
+            </a:solidFill>
+            <a:prstDash val="solid"/>
+          </a:ln>
+        </p:spPr>
+      </p:sp>
+      <p:sp>
+        <p:nvSpPr>
+          <p:cNvPr id="20" name="Shape 18"/>
+          <p:cNvSpPr/>
+          <p:nvPr/>
+        </p:nvSpPr>
+        <p:spPr>
+          <a:xfrm>
+            <a:off x="4206240" y="2788920"/>
+            <a:ext cx="64008" cy="3474720"/>
+          </a:xfrm>
+          <a:prstGeom prst="rect">
+            <a:avLst/>
+          </a:prstGeom>
+          <a:solidFill>
+            <a:srgbClr val="3B7DD8"/>
+          </a:solidFill>
+          <a:ln w="12700">
+            <a:solidFill>
+              <a:srgbClr val="3B7DD8"/>
+            </a:solidFill>
+            <a:prstDash val="solid"/>
+          </a:ln>
+        </p:spPr>
+      </p:sp>
+      <p:sp>
+        <p:nvSpPr>
+          <p:cNvPr id="21" name="Text 19"/>
+          <p:cNvSpPr txBox="1"/>
+          <p:nvPr/>
+        </p:nvSpPr>
+        <p:spPr>
+          <a:xfrm>
+            <a:off x="4389120" y="2926080"/>
+            <a:ext cx="3200400" cy="411480"/>
+          </a:xfrm>
+          <a:prstGeom prst="rect">
+            <a:avLst/>
+          </a:prstGeom>
+          <a:noFill/>
+          <a:ln/>
+        </p:spPr>
+        <p:txBody>
+          <a:bodyPr wrap="square" rtlCol="0" anchor="ctr"/>
+          <a:lstStyle/>
+          <a:p>
+            <a:pPr indent="0" marL="0">
+              <a:buNone/>
+            </a:pPr>
+            <a:r>
+              <a:rPr lang="en-US" sz="1300" b="1" dirty="0">
+                <a:solidFill>
+                  <a:srgbClr val="3B7DD8"/>
+                </a:solidFill>
+                <a:latin typeface="Calibri" pitchFamily="34" charset="0"/>
+                <a:ea typeface="Calibri" pitchFamily="34" charset="-122"/>
+                <a:cs typeface="Calibri" pitchFamily="34" charset="-120"/>
+              </a:rPr>
+              <a:t>RECIEN INGRESADO</a:t>
+            </a:r>
+            <a:endParaRPr lang="en-US" sz="1300" dirty="0"/>
+          </a:p>
+        </p:txBody>
+      </p:sp>
+      <p:sp>
+        <p:nvSpPr>
+          <p:cNvPr id="22" name="Text 20"/>
+          <p:cNvSpPr txBox="1"/>
+          <p:nvPr/>
+        </p:nvSpPr>
+        <p:spPr>
+          <a:xfrm>
+            <a:off x="4370832" y="3401568"/>
+            <a:ext cx="3200400" cy="2651760"/>
+          </a:xfrm>
+          <a:prstGeom prst="rect">
+            <a:avLst/>
+          </a:prstGeom>
+          <a:noFill/>
+          <a:ln/>
+        </p:spPr>
+        <p:txBody>
+          <a:bodyPr wrap="square" rtlCol="0" anchor="ctr"/>
+          <a:lstStyle/>
+          <a:p>
+            <a:pPr indent="0" marL="0">
+              <a:buNone/>
+            </a:pPr>
+            <a:r>
+              <a:rPr lang="en-US" sz="1100" dirty="0">
+                <a:solidFill>
+                  <a:srgbClr val="4B5563"/>
+                </a:solidFill>
+                <a:latin typeface="Calibri" pitchFamily="34" charset="0"/>
+                <a:ea typeface="Calibri" pitchFamily="34" charset="-122"/>
+                <a:cs typeface="Calibri" pitchFamily="34" charset="-120"/>
+              </a:rPr>
+              <a:t>Productos con compra registrada reciente. La rotacion todavia no se puede medir con precision. Monitorear en los proximos 60-90 dias.</a:t>
+            </a:r>
+            <a:endParaRPr lang="en-US" sz="1100" dirty="0"/>
+          </a:p>
+        </p:txBody>
+      </p:sp>
+      <p:sp>
+        <p:nvSpPr>
+          <p:cNvPr id="23" name="Shape 21"/>
+          <p:cNvSpPr/>
+          <p:nvPr/>
+        </p:nvSpPr>
+        <p:spPr>
+          <a:xfrm>
+            <a:off x="7955280" y="2788920"/>
+            <a:ext cx="3474720" cy="3474720"/>
+          </a:xfrm>
+          <a:prstGeom prst="roundRect">
+            <a:avLst>
+              <a:gd name="adj" fmla="val 1842"/>
+            </a:avLst>
+          </a:prstGeom>
+          <a:solidFill>
+            <a:srgbClr val="FFFFFF"/>
+          </a:solidFill>
+          <a:ln w="12700">
+            <a:solidFill>
+              <a:srgbClr val="E5E7EB"/>
+            </a:solidFill>
+            <a:prstDash val="solid"/>
+          </a:ln>
+        </p:spPr>
+      </p:sp>
+      <p:sp>
+        <p:nvSpPr>
+          <p:cNvPr id="24" name="Shape 22"/>
+          <p:cNvSpPr/>
+          <p:nvPr/>
+        </p:nvSpPr>
+        <p:spPr>
+          <a:xfrm>
+            <a:off x="7955280" y="2788920"/>
+            <a:ext cx="64008" cy="3474720"/>
+          </a:xfrm>
+          <a:prstGeom prst="rect">
+            <a:avLst/>
+          </a:prstGeom>
+          <a:solidFill>
+            <a:srgbClr val="7C3AED"/>
+          </a:solidFill>
+          <a:ln w="12700">
+            <a:solidFill>
+              <a:srgbClr val="7C3AED"/>
+            </a:solidFill>
+            <a:prstDash val="solid"/>
+          </a:ln>
+        </p:spPr>
+      </p:sp>
+      <p:sp>
+        <p:nvSpPr>
+          <p:cNvPr id="25" name="Text 23"/>
+          <p:cNvSpPr txBox="1"/>
+          <p:nvPr/>
+        </p:nvSpPr>
+        <p:spPr>
+          <a:xfrm>
+            <a:off x="8138160" y="2926080"/>
+            <a:ext cx="3200400" cy="411480"/>
+          </a:xfrm>
+          <a:prstGeom prst="rect">
+            <a:avLst/>
+          </a:prstGeom>
+          <a:noFill/>
+          <a:ln/>
+        </p:spPr>
+        <p:txBody>
+          <a:bodyPr wrap="square" rtlCol="0" anchor="ctr"/>
+          <a:lstStyle/>
+          <a:p>
+            <a:pPr indent="0" marL="0">
+              <a:buNone/>
+            </a:pPr>
+            <a:r>
+              <a:rPr lang="en-US" sz="1300" b="1" dirty="0">
+                <a:solidFill>
+                  <a:srgbClr val="7C3AED"/>
+                </a:solidFill>
+                <a:latin typeface="Calibri" pitchFamily="34" charset="0"/>
+                <a:ea typeface="Calibri" pitchFamily="34" charset="-122"/>
+                <a:cs typeface="Calibri" pitchFamily="34" charset="-120"/>
+              </a:rPr>
+              <a:t>TIENE PEDIDO</a:t>
+            </a:r>
+            <a:endParaRPr lang="en-US" sz="1300" dirty="0"/>
+          </a:p>
+        </p:txBody>
+      </p:sp>
+      <p:sp>
+        <p:nvSpPr>
+          <p:cNvPr id="26" name="Text 24"/>
+          <p:cNvSpPr txBox="1"/>
+          <p:nvPr/>
+        </p:nvSpPr>
+        <p:spPr>
+          <a:xfrm>
+            <a:off x="8119872" y="3401568"/>
+            <a:ext cx="3200400" cy="2651760"/>
+          </a:xfrm>
+          <a:prstGeom prst="rect">
+            <a:avLst/>
+          </a:prstGeom>
+          <a:noFill/>
+          <a:ln/>
+        </p:spPr>
+        <p:txBody>
+          <a:bodyPr wrap="square" rtlCol="0" anchor="ctr"/>
+          <a:lstStyle/>
+          <a:p>
+            <a:pPr indent="0" marL="0">
+              <a:buNone/>
+            </a:pPr>
+            <a:r>
+              <a:rPr lang="en-US" sz="1100" dirty="0">
+                <a:solidFill>
+                  <a:srgbClr val="4B5563"/>
+                </a:solidFill>
+                <a:latin typeface="Calibri" pitchFamily="34" charset="0"/>
+                <a:ea typeface="Calibri" pitchFamily="34" charset="-122"/>
+                <a:cs typeface="Calibri" pitchFamily="34" charset="-120"/>
+              </a:rPr>
+              <a:t>Ya tienen un requerimiento confirmado en camino. El stock actual puede estar bajo pero hay reposicion en curso.</a:t>
+            </a:r>
+            <a:endParaRPr lang="en-US" sz="1100" dirty="0"/>
+          </a:p>
+        </p:txBody>
+      </p:sp>
+    </p:spTree>
+  </p:cSld>
+  <p:clrMapOvr>
+    <a:masterClrMapping/>
+  </p:clrMapOvr>
+</p:sld>
+</file>
+
+<file path=ppt/slides/slide11.xml><?xml version="1.0" encoding="utf-8"?>
+<p:sld xmlns:a="http://schemas.openxmlformats.org/drawingml/2006/main" xmlns:r="http://schemas.openxmlformats.org/officeDocument/2006/relationships" xmlns:p="http://schemas.openxmlformats.org/presentationml/2006/main">
+  <p:cSld name="Slide 11">
+    <p:bg>
+      <p:bgPr>
+        <a:solidFill>
+          <a:srgbClr val="F4F6FB"/>
+        </a:solidFill>
+      </p:bgPr>
+    </p:bg>
+    <p:spTree>
+      <p:nvGrpSpPr>
+        <p:cNvPr id="1" name=""/>
+        <p:cNvGrpSpPr/>
+        <p:nvPr/>
+      </p:nvGrpSpPr>
+      <p:grpSpPr>
+        <a:xfrm>
+          <a:off x="0" y="0"/>
+          <a:ext cx="0" cy="0"/>
+          <a:chOff x="0" y="0"/>
+          <a:chExt cx="0" cy="0"/>
+        </a:xfrm>
+      </p:grpSpPr>
+      <p:sp>
+        <p:nvSpPr>
+          <p:cNvPr id="2" name="Text 0"/>
+          <p:cNvSpPr txBox="1"/>
+          <p:nvPr/>
+        </p:nvSpPr>
+        <p:spPr>
+          <a:xfrm>
+            <a:off x="502920" y="228600"/>
+            <a:ext cx="11155680" cy="685800"/>
+          </a:xfrm>
+          <a:prstGeom prst="rect">
+            <a:avLst/>
+          </a:prstGeom>
+          <a:noFill/>
+          <a:ln/>
+        </p:spPr>
+        <p:txBody>
+          <a:bodyPr wrap="square" rtlCol="0" anchor="ctr"/>
+          <a:lstStyle/>
+          <a:p>
+            <a:pPr indent="0" marL="0">
+              <a:buNone/>
+            </a:pPr>
+            <a:r>
+              <a:rPr lang="en-US" sz="3000" b="1" dirty="0">
+                <a:solidFill>
+                  <a:srgbClr val="1B2E5E"/>
+                </a:solidFill>
+                <a:latin typeface="Cambria" pitchFamily="34" charset="0"/>
+                <a:ea typeface="Cambria" pitchFamily="34" charset="-122"/>
+                <a:cs typeface="Cambria" pitchFamily="34" charset="-120"/>
+              </a:rPr>
               <a:t>Proximos Requerimientos</a:t>
             </a:r>
             <a:endParaRPr lang="en-US" sz="3000" dirty="0"/>
@@ -3090,7 +4478,7 @@
       </p:sp>
       <p:graphicFrame>
         <p:nvGraphicFramePr>
-          <p:cNvPr id="11" name="Table 0"/>
+          <p:cNvPr id="12" name="Table 0"/>
           <p:cNvGraphicFramePr>
             <a:graphicFrameLocks noGrp="1"/>
           </p:cNvGraphicFramePr>
@@ -8215,9 +9603,9 @@
 </p:sld>
 </file>
 
-<file path=ppt/slides/slide11.xml><?xml version="1.0" encoding="utf-8"?>
+<file path=ppt/slides/slide12.xml><?xml version="1.0" encoding="utf-8"?>
 <p:sld xmlns:a="http://schemas.openxmlformats.org/drawingml/2006/main" xmlns:r="http://schemas.openxmlformats.org/officeDocument/2006/relationships" xmlns:p="http://schemas.openxmlformats.org/presentationml/2006/main">
-  <p:cSld name="Slide 11">
+  <p:cSld name="Slide 12">
     <p:bg>
       <p:bgPr>
         <a:solidFill>
@@ -8501,7 +9889,7 @@
             <a:r>
               <a:rPr lang="en-US" sz="2600" b="1" dirty="0">
                 <a:solidFill>
-                  <a:srgbClr val="D97706"/>
+                  <a:srgbClr val="22A45D"/>
                 </a:solidFill>
                 <a:latin typeface="Cambria" pitchFamily="34" charset="0"/>
                 <a:ea typeface="Cambria" pitchFamily="34" charset="-122"/>
@@ -8546,7 +9934,7 @@
                 <a:ea typeface="Calibri" pitchFamily="34" charset="-122"/>
                 <a:cs typeface="Calibri" pitchFamily="34" charset="-120"/>
               </a:rPr>
-              <a:t>Acciones ya iniciadas</a:t>
+              <a:t>El aging se esta reduciendo</a:t>
             </a:r>
             <a:endParaRPr lang="en-US" sz="1200" dirty="0"/>
           </a:p>
@@ -8585,7 +9973,7 @@
                 <a:ea typeface="Calibri" pitchFamily="34" charset="-122"/>
                 <a:cs typeface="Calibri" pitchFamily="34" charset="-120"/>
               </a:rPr>
-              <a:t>Preventa lanzada en productos con aging registrado. Liquidacion iniciada en Carteleria y Vinilos de Corte. Cyber Mayorista contemplado para acelerar salida.</a:t>
+              <a:t>En 6 meses se redujo $434.895 del aging valorizado (−21%). Carteleria y Papeleria lideran la recuperacion con mas del 44% de reduccion.</a:t>
             </a:r>
             <a:endParaRPr lang="en-US" sz="1050" dirty="0"/>
           </a:p>
@@ -8789,7 +10177,7 @@
             <a:r>
               <a:rPr lang="en-US" sz="2600" b="1" dirty="0">
                 <a:solidFill>
-                  <a:srgbClr val="22A45D"/>
+                  <a:srgbClr val="D97706"/>
                 </a:solidFill>
                 <a:latin typeface="Cambria" pitchFamily="34" charset="0"/>
                 <a:ea typeface="Cambria" pitchFamily="34" charset="-122"/>
@@ -13138,6 +14526,2664 @@
                 <a:ea typeface="Cambria" pitchFamily="34" charset="-122"/>
                 <a:cs typeface="Cambria" pitchFamily="34" charset="-120"/>
               </a:rPr>
+              <a:t>Evolución del Aging — Mar a Sep 2026</a:t>
+            </a:r>
+            <a:endParaRPr lang="en-US" sz="3000" dirty="0"/>
+          </a:p>
+        </p:txBody>
+      </p:sp>
+      <p:sp>
+        <p:nvSpPr>
+          <p:cNvPr id="3" name="Text 1"/>
+          <p:cNvSpPr txBox="1"/>
+          <p:nvPr/>
+        </p:nvSpPr>
+        <p:spPr>
+          <a:xfrm>
+            <a:off x="502920" y="804672"/>
+            <a:ext cx="11155680" cy="365760"/>
+          </a:xfrm>
+          <a:prstGeom prst="rect">
+            <a:avLst/>
+          </a:prstGeom>
+          <a:noFill/>
+          <a:ln/>
+        </p:spPr>
+        <p:txBody>
+          <a:bodyPr wrap="square" rtlCol="0" anchor="ctr"/>
+          <a:lstStyle/>
+          <a:p>
+            <a:pPr indent="0" marL="0">
+              <a:buNone/>
+            </a:pPr>
+            <a:r>
+              <a:rPr lang="en-US" sz="1300" dirty="0">
+                <a:solidFill>
+                  <a:srgbClr val="4B5563"/>
+                </a:solidFill>
+                <a:latin typeface="Calibri" pitchFamily="34" charset="0"/>
+                <a:ea typeface="Calibri" pitchFamily="34" charset="-122"/>
+                <a:cs typeface="Calibri" pitchFamily="34" charset="-120"/>
+              </a:rPr>
+              <a:t>Reducción del stock aging por categoria en los últimos 6 meses</a:t>
+            </a:r>
+            <a:endParaRPr lang="en-US" sz="1300" dirty="0"/>
+          </a:p>
+        </p:txBody>
+      </p:sp>
+      <p:sp>
+        <p:nvSpPr>
+          <p:cNvPr id="4" name="Shape 2"/>
+          <p:cNvSpPr/>
+          <p:nvPr/>
+        </p:nvSpPr>
+        <p:spPr>
+          <a:xfrm>
+            <a:off x="457200" y="1005840"/>
+            <a:ext cx="3474720" cy="1645920"/>
+          </a:xfrm>
+          <a:prstGeom prst="roundRect">
+            <a:avLst>
+              <a:gd name="adj" fmla="val 3889"/>
+            </a:avLst>
+          </a:prstGeom>
+          <a:solidFill>
+            <a:srgbClr val="FFFFFF"/>
+          </a:solidFill>
+          <a:ln w="12700">
+            <a:solidFill>
+              <a:srgbClr val="E5E7EB"/>
+            </a:solidFill>
+            <a:prstDash val="solid"/>
+          </a:ln>
+        </p:spPr>
+      </p:sp>
+      <p:sp>
+        <p:nvSpPr>
+          <p:cNvPr id="5" name="Shape 3"/>
+          <p:cNvSpPr/>
+          <p:nvPr/>
+        </p:nvSpPr>
+        <p:spPr>
+          <a:xfrm>
+            <a:off x="457200" y="1005840"/>
+            <a:ext cx="64008" cy="1645920"/>
+          </a:xfrm>
+          <a:prstGeom prst="rect">
+            <a:avLst/>
+          </a:prstGeom>
+          <a:solidFill>
+            <a:srgbClr val="C0392B"/>
+          </a:solidFill>
+          <a:ln w="12700">
+            <a:solidFill>
+              <a:srgbClr val="C0392B"/>
+            </a:solidFill>
+            <a:prstDash val="solid"/>
+          </a:ln>
+        </p:spPr>
+      </p:sp>
+      <p:sp>
+        <p:nvSpPr>
+          <p:cNvPr id="6" name="Text 4"/>
+          <p:cNvSpPr txBox="1"/>
+          <p:nvPr/>
+        </p:nvSpPr>
+        <p:spPr>
+          <a:xfrm>
+            <a:off x="685800" y="1115568"/>
+            <a:ext cx="3154680" cy="640080"/>
+          </a:xfrm>
+          <a:prstGeom prst="rect">
+            <a:avLst/>
+          </a:prstGeom>
+          <a:noFill/>
+          <a:ln/>
+        </p:spPr>
+        <p:txBody>
+          <a:bodyPr wrap="square" rtlCol="0" anchor="ctr"/>
+          <a:lstStyle/>
+          <a:p>
+            <a:pPr algn="ctr" indent="0" marL="0">
+              <a:buNone/>
+            </a:pPr>
+            <a:r>
+              <a:rPr lang="en-US" sz="2400" b="1" dirty="0">
+                <a:solidFill>
+                  <a:srgbClr val="1B2E5E"/>
+                </a:solidFill>
+                <a:latin typeface="Cambria" pitchFamily="34" charset="0"/>
+                <a:ea typeface="Cambria" pitchFamily="34" charset="-122"/>
+                <a:cs typeface="Cambria" pitchFamily="34" charset="-120"/>
+              </a:rPr>
+              <a:t>$1.763.802</a:t>
+            </a:r>
+            <a:endParaRPr lang="en-US" sz="2400" dirty="0"/>
+          </a:p>
+        </p:txBody>
+      </p:sp>
+      <p:sp>
+        <p:nvSpPr>
+          <p:cNvPr id="7" name="Text 5"/>
+          <p:cNvSpPr txBox="1"/>
+          <p:nvPr/>
+        </p:nvSpPr>
+        <p:spPr>
+          <a:xfrm>
+            <a:off x="685800" y="1755648"/>
+            <a:ext cx="3154680" cy="685800"/>
+          </a:xfrm>
+          <a:prstGeom prst="rect">
+            <a:avLst/>
+          </a:prstGeom>
+          <a:noFill/>
+          <a:ln/>
+        </p:spPr>
+        <p:txBody>
+          <a:bodyPr wrap="square" rtlCol="0" anchor="ctr"/>
+          <a:lstStyle/>
+          <a:p>
+            <a:pPr algn="ctr" indent="0" marL="0">
+              <a:buNone/>
+            </a:pPr>
+            <a:r>
+              <a:rPr lang="en-US" sz="1100" dirty="0">
+                <a:solidFill>
+                  <a:srgbClr val="4B5563"/>
+                </a:solidFill>
+                <a:latin typeface="Calibri" pitchFamily="34" charset="0"/>
+                <a:ea typeface="Calibri" pitchFamily="34" charset="-122"/>
+                <a:cs typeface="Calibri" pitchFamily="34" charset="-120"/>
+              </a:rPr>
+              <a:t>Aging valorizado</a:t>
+            </a:r>
+            <a:endParaRPr lang="en-US" sz="1100" dirty="0"/>
+          </a:p>
+          <a:p>
+            <a:pPr algn="ctr" indent="0" marL="0">
+              <a:buNone/>
+            </a:pPr>
+            <a:r>
+              <a:rPr lang="en-US" sz="1100" dirty="0">
+                <a:solidFill>
+                  <a:srgbClr val="4B5563"/>
+                </a:solidFill>
+                <a:latin typeface="Calibri" pitchFamily="34" charset="0"/>
+                <a:ea typeface="Calibri" pitchFamily="34" charset="-122"/>
+                <a:cs typeface="Calibri" pitchFamily="34" charset="-120"/>
+              </a:rPr>
+              <a:t>19 de Marzo</a:t>
+            </a:r>
+            <a:endParaRPr lang="en-US" sz="1100" dirty="0"/>
+          </a:p>
+        </p:txBody>
+      </p:sp>
+      <p:sp>
+        <p:nvSpPr>
+          <p:cNvPr id="8" name="Shape 6"/>
+          <p:cNvSpPr/>
+          <p:nvPr/>
+        </p:nvSpPr>
+        <p:spPr>
+          <a:xfrm>
+            <a:off x="4343400" y="1005840"/>
+            <a:ext cx="3474720" cy="1645920"/>
+          </a:xfrm>
+          <a:prstGeom prst="roundRect">
+            <a:avLst>
+              <a:gd name="adj" fmla="val 3889"/>
+            </a:avLst>
+          </a:prstGeom>
+          <a:solidFill>
+            <a:srgbClr val="FFFFFF"/>
+          </a:solidFill>
+          <a:ln w="12700">
+            <a:solidFill>
+              <a:srgbClr val="E5E7EB"/>
+            </a:solidFill>
+            <a:prstDash val="solid"/>
+          </a:ln>
+        </p:spPr>
+      </p:sp>
+      <p:sp>
+        <p:nvSpPr>
+          <p:cNvPr id="9" name="Shape 7"/>
+          <p:cNvSpPr/>
+          <p:nvPr/>
+        </p:nvSpPr>
+        <p:spPr>
+          <a:xfrm>
+            <a:off x="4343400" y="1005840"/>
+            <a:ext cx="64008" cy="1645920"/>
+          </a:xfrm>
+          <a:prstGeom prst="rect">
+            <a:avLst/>
+          </a:prstGeom>
+          <a:solidFill>
+            <a:srgbClr val="D97706"/>
+          </a:solidFill>
+          <a:ln w="12700">
+            <a:solidFill>
+              <a:srgbClr val="D97706"/>
+            </a:solidFill>
+            <a:prstDash val="solid"/>
+          </a:ln>
+        </p:spPr>
+      </p:sp>
+      <p:sp>
+        <p:nvSpPr>
+          <p:cNvPr id="10" name="Text 8"/>
+          <p:cNvSpPr txBox="1"/>
+          <p:nvPr/>
+        </p:nvSpPr>
+        <p:spPr>
+          <a:xfrm>
+            <a:off x="4572000" y="1115568"/>
+            <a:ext cx="3154680" cy="640080"/>
+          </a:xfrm>
+          <a:prstGeom prst="rect">
+            <a:avLst/>
+          </a:prstGeom>
+          <a:noFill/>
+          <a:ln/>
+        </p:spPr>
+        <p:txBody>
+          <a:bodyPr wrap="square" rtlCol="0" anchor="ctr"/>
+          <a:lstStyle/>
+          <a:p>
+            <a:pPr algn="ctr" indent="0" marL="0">
+              <a:buNone/>
+            </a:pPr>
+            <a:r>
+              <a:rPr lang="en-US" sz="2400" b="1" dirty="0">
+                <a:solidFill>
+                  <a:srgbClr val="1B2E5E"/>
+                </a:solidFill>
+                <a:latin typeface="Cambria" pitchFamily="34" charset="0"/>
+                <a:ea typeface="Cambria" pitchFamily="34" charset="-122"/>
+                <a:cs typeface="Cambria" pitchFamily="34" charset="-120"/>
+              </a:rPr>
+              <a:t>$1.328.907</a:t>
+            </a:r>
+            <a:endParaRPr lang="en-US" sz="2400" dirty="0"/>
+          </a:p>
+        </p:txBody>
+      </p:sp>
+      <p:sp>
+        <p:nvSpPr>
+          <p:cNvPr id="11" name="Text 9"/>
+          <p:cNvSpPr txBox="1"/>
+          <p:nvPr/>
+        </p:nvSpPr>
+        <p:spPr>
+          <a:xfrm>
+            <a:off x="4572000" y="1755648"/>
+            <a:ext cx="3154680" cy="685800"/>
+          </a:xfrm>
+          <a:prstGeom prst="rect">
+            <a:avLst/>
+          </a:prstGeom>
+          <a:noFill/>
+          <a:ln/>
+        </p:spPr>
+        <p:txBody>
+          <a:bodyPr wrap="square" rtlCol="0" anchor="ctr"/>
+          <a:lstStyle/>
+          <a:p>
+            <a:pPr algn="ctr" indent="0" marL="0">
+              <a:buNone/>
+            </a:pPr>
+            <a:r>
+              <a:rPr lang="en-US" sz="1100" dirty="0">
+                <a:solidFill>
+                  <a:srgbClr val="4B5563"/>
+                </a:solidFill>
+                <a:latin typeface="Calibri" pitchFamily="34" charset="0"/>
+                <a:ea typeface="Calibri" pitchFamily="34" charset="-122"/>
+                <a:cs typeface="Calibri" pitchFamily="34" charset="-120"/>
+              </a:rPr>
+              <a:t>Aging valorizado</a:t>
+            </a:r>
+            <a:endParaRPr lang="en-US" sz="1100" dirty="0"/>
+          </a:p>
+          <a:p>
+            <a:pPr algn="ctr" indent="0" marL="0">
+              <a:buNone/>
+            </a:pPr>
+            <a:r>
+              <a:rPr lang="en-US" sz="1100" dirty="0">
+                <a:solidFill>
+                  <a:srgbClr val="4B5563"/>
+                </a:solidFill>
+                <a:latin typeface="Calibri" pitchFamily="34" charset="0"/>
+                <a:ea typeface="Calibri" pitchFamily="34" charset="-122"/>
+                <a:cs typeface="Calibri" pitchFamily="34" charset="-120"/>
+              </a:rPr>
+              <a:t>19 de Septiembre</a:t>
+            </a:r>
+            <a:endParaRPr lang="en-US" sz="1100" dirty="0"/>
+          </a:p>
+        </p:txBody>
+      </p:sp>
+      <p:sp>
+        <p:nvSpPr>
+          <p:cNvPr id="12" name="Shape 10"/>
+          <p:cNvSpPr/>
+          <p:nvPr/>
+        </p:nvSpPr>
+        <p:spPr>
+          <a:xfrm>
+            <a:off x="8229600" y="1005840"/>
+            <a:ext cx="3474720" cy="1645920"/>
+          </a:xfrm>
+          <a:prstGeom prst="roundRect">
+            <a:avLst>
+              <a:gd name="adj" fmla="val 3889"/>
+            </a:avLst>
+          </a:prstGeom>
+          <a:solidFill>
+            <a:srgbClr val="FFFFFF"/>
+          </a:solidFill>
+          <a:ln w="12700">
+            <a:solidFill>
+              <a:srgbClr val="E5E7EB"/>
+            </a:solidFill>
+            <a:prstDash val="solid"/>
+          </a:ln>
+        </p:spPr>
+      </p:sp>
+      <p:sp>
+        <p:nvSpPr>
+          <p:cNvPr id="13" name="Shape 11"/>
+          <p:cNvSpPr/>
+          <p:nvPr/>
+        </p:nvSpPr>
+        <p:spPr>
+          <a:xfrm>
+            <a:off x="8229600" y="1005840"/>
+            <a:ext cx="64008" cy="1645920"/>
+          </a:xfrm>
+          <a:prstGeom prst="rect">
+            <a:avLst/>
+          </a:prstGeom>
+          <a:solidFill>
+            <a:srgbClr val="22A45D"/>
+          </a:solidFill>
+          <a:ln w="12700">
+            <a:solidFill>
+              <a:srgbClr val="22A45D"/>
+            </a:solidFill>
+            <a:prstDash val="solid"/>
+          </a:ln>
+        </p:spPr>
+      </p:sp>
+      <p:sp>
+        <p:nvSpPr>
+          <p:cNvPr id="14" name="Text 12"/>
+          <p:cNvSpPr txBox="1"/>
+          <p:nvPr/>
+        </p:nvSpPr>
+        <p:spPr>
+          <a:xfrm>
+            <a:off x="8458200" y="1115568"/>
+            <a:ext cx="3154680" cy="640080"/>
+          </a:xfrm>
+          <a:prstGeom prst="rect">
+            <a:avLst/>
+          </a:prstGeom>
+          <a:noFill/>
+          <a:ln/>
+        </p:spPr>
+        <p:txBody>
+          <a:bodyPr wrap="square" rtlCol="0" anchor="ctr"/>
+          <a:lstStyle/>
+          <a:p>
+            <a:pPr algn="ctr" indent="0" marL="0">
+              <a:buNone/>
+            </a:pPr>
+            <a:r>
+              <a:rPr lang="en-US" sz="2400" b="1" dirty="0">
+                <a:solidFill>
+                  <a:srgbClr val="22A45D"/>
+                </a:solidFill>
+                <a:latin typeface="Cambria" pitchFamily="34" charset="0"/>
+                <a:ea typeface="Cambria" pitchFamily="34" charset="-122"/>
+                <a:cs typeface="Cambria" pitchFamily="34" charset="-120"/>
+              </a:rPr>
+              <a:t>-$434.895</a:t>
+            </a:r>
+            <a:endParaRPr lang="en-US" sz="2400" dirty="0"/>
+          </a:p>
+        </p:txBody>
+      </p:sp>
+      <p:sp>
+        <p:nvSpPr>
+          <p:cNvPr id="15" name="Text 13"/>
+          <p:cNvSpPr txBox="1"/>
+          <p:nvPr/>
+        </p:nvSpPr>
+        <p:spPr>
+          <a:xfrm>
+            <a:off x="8458200" y="1755648"/>
+            <a:ext cx="3154680" cy="685800"/>
+          </a:xfrm>
+          <a:prstGeom prst="rect">
+            <a:avLst/>
+          </a:prstGeom>
+          <a:noFill/>
+          <a:ln/>
+        </p:spPr>
+        <p:txBody>
+          <a:bodyPr wrap="square" rtlCol="0" anchor="ctr"/>
+          <a:lstStyle/>
+          <a:p>
+            <a:pPr algn="ctr" indent="0" marL="0">
+              <a:buNone/>
+            </a:pPr>
+            <a:r>
+              <a:rPr lang="en-US" sz="1100" dirty="0">
+                <a:solidFill>
+                  <a:srgbClr val="4B5563"/>
+                </a:solidFill>
+                <a:latin typeface="Calibri" pitchFamily="34" charset="0"/>
+                <a:ea typeface="Calibri" pitchFamily="34" charset="-122"/>
+                <a:cs typeface="Calibri" pitchFamily="34" charset="-120"/>
+              </a:rPr>
+              <a:t>Reducción total</a:t>
+            </a:r>
+            <a:endParaRPr lang="en-US" sz="1100" dirty="0"/>
+          </a:p>
+          <a:p>
+            <a:pPr algn="ctr" indent="0" marL="0">
+              <a:buNone/>
+            </a:pPr>
+            <a:r>
+              <a:rPr lang="en-US" sz="1100" dirty="0">
+                <a:solidFill>
+                  <a:srgbClr val="4B5563"/>
+                </a:solidFill>
+                <a:latin typeface="Calibri" pitchFamily="34" charset="0"/>
+                <a:ea typeface="Calibri" pitchFamily="34" charset="-122"/>
+                <a:cs typeface="Calibri" pitchFamily="34" charset="-120"/>
+              </a:rPr>
+              <a:t>en 6 meses (−21%)</a:t>
+            </a:r>
+            <a:endParaRPr lang="en-US" sz="1100" dirty="0"/>
+          </a:p>
+        </p:txBody>
+      </p:sp>
+      <p:graphicFrame>
+        <p:nvGraphicFramePr>
+          <p:cNvPr id="16" name="Chart 0" descr=""/>
+          <p:cNvGraphicFramePr/>
+          <p:nvPr/>
+        </p:nvGraphicFramePr>
+        <p:xfrm>
+          <a:off x="457200" y="2880360"/>
+          <a:ext cx="7315200" cy="3749040"/>
+        </p:xfrm>
+        <a:graphic xmlns:a="http://schemas.openxmlformats.org/drawingml/2006/main">
+          <a:graphicData uri="http://schemas.openxmlformats.org/drawingml/2006/chart">
+            <c:chart xmlns:c="http://schemas.openxmlformats.org/drawingml/2006/chart" r:id="rId1"/>
+          </a:graphicData>
+        </a:graphic>
+      </p:graphicFrame>
+      <p:graphicFrame>
+        <p:nvGraphicFramePr>
+          <p:cNvPr id="7" name="Table 0"/>
+          <p:cNvGraphicFramePr>
+            <a:graphicFrameLocks noGrp="1"/>
+          </p:cNvGraphicFramePr>
+          <p:nvPr>
+            <p:extLst>
+              <p:ext uri="{D42A27DB-BD31-4B8C-83A1-F6EECF244321}">
+                <p14:modId xmlns:p14="http://schemas.microsoft.com/office/powerpoint/2010/main" val="1579011935"/>
+              </p:ext>
+            </p:extLst>
+          </p:nvPr>
+        </p:nvGraphicFramePr>
+        <p:xfrm>
+          <a:off x="8046720" y="2834640"/>
+          <a:ext cx="3657600" cy="3840480"/>
+        </p:xfrm>
+        <a:graphic>
+          <a:graphicData uri="http://schemas.openxmlformats.org/drawingml/2006/table">
+            <a:tbl>
+              <a:tblPr/>
+              <a:tblGrid>
+                <a:gridCol w="1219200"/>
+                <a:gridCol w="1219200"/>
+                <a:gridCol w="1219200"/>
+              </a:tblGrid>
+              <a:tr h="393192">
+                <a:tc>
+                  <a:txBody>
+                    <a:bodyPr/>
+                    <a:lstStyle/>
+                    <a:p>
+                      <a:pPr indent="0" marL="0">
+                        <a:buNone/>
+                      </a:pPr>
+                      <a:r>
+                        <a:rPr lang="en-US" sz="1100" b="1" dirty="0">
+                          <a:solidFill>
+                            <a:srgbClr val="FFFFFF"/>
+                          </a:solidFill>
+                          <a:latin typeface="Calibri" pitchFamily="34" charset="0"/>
+                          <a:ea typeface="Calibri" pitchFamily="34" charset="-122"/>
+                          <a:cs typeface="Calibri" pitchFamily="34" charset="-120"/>
+                        </a:rPr>
+                        <a:t>Categoria</a:t>
+                      </a:r>
+                      <a:endParaRPr lang="en-US" sz="1100" dirty="0">
+                        <a:latin typeface="Calibri" charset="0"/>
+                        <a:ea typeface="Calibri" charset="0"/>
+                        <a:cs typeface="Calibri" charset="0"/>
+                      </a:endParaRPr>
+                    </a:p>
+                  </a:txBody>
+                  <a:tcPr marL="91440" marR="91440" marT="45720" marB="45720">
+                    <a:lnL w="6350" cap="flat" cmpd="sng" algn="ctr">
+                      <a:solidFill>
+                        <a:srgbClr val="E5E7EB"/>
+                      </a:solidFill>
+                      <a:prstDash val="solid"/>
+                      <a:round/>
+                      <a:headEnd type="none" w="med" len="med"/>
+                      <a:tailEnd type="none" w="med" len="med"/>
+                    </a:lnL>
+                    <a:lnR w="6350" cap="flat" cmpd="sng" algn="ctr">
+                      <a:solidFill>
+                        <a:srgbClr val="E5E7EB"/>
+                      </a:solidFill>
+                      <a:prstDash val="solid"/>
+                      <a:round/>
+                      <a:headEnd type="none" w="med" len="med"/>
+                      <a:tailEnd type="none" w="med" len="med"/>
+                    </a:lnR>
+                    <a:lnT w="6350" cap="flat" cmpd="sng" algn="ctr">
+                      <a:solidFill>
+                        <a:srgbClr val="E5E7EB"/>
+                      </a:solidFill>
+                      <a:prstDash val="solid"/>
+                      <a:round/>
+                      <a:headEnd type="none" w="med" len="med"/>
+                      <a:tailEnd type="none" w="med" len="med"/>
+                    </a:lnT>
+                    <a:lnB w="6350" cap="flat" cmpd="sng" algn="ctr">
+                      <a:solidFill>
+                        <a:srgbClr val="E5E7EB"/>
+                      </a:solidFill>
+                      <a:prstDash val="solid"/>
+                      <a:round/>
+                      <a:headEnd type="none" w="med" len="med"/>
+                      <a:tailEnd type="none" w="med" len="med"/>
+                    </a:lnB>
+                    <a:solidFill>
+                      <a:srgbClr val="1B2E5E"/>
+                    </a:solidFill>
+                  </a:tcPr>
+                </a:tc>
+                <a:tc>
+                  <a:txBody>
+                    <a:bodyPr/>
+                    <a:lstStyle/>
+                    <a:p>
+                      <a:pPr algn="ctr" indent="0" marL="0">
+                        <a:buNone/>
+                      </a:pPr>
+                      <a:r>
+                        <a:rPr lang="en-US" sz="1100" b="1" dirty="0">
+                          <a:solidFill>
+                            <a:srgbClr val="FFFFFF"/>
+                          </a:solidFill>
+                          <a:latin typeface="Calibri" pitchFamily="34" charset="0"/>
+                          <a:ea typeface="Calibri" pitchFamily="34" charset="-122"/>
+                          <a:cs typeface="Calibri" pitchFamily="34" charset="-120"/>
+                        </a:rPr>
+                        <a:t>Reducc. $</a:t>
+                      </a:r>
+                      <a:endParaRPr lang="en-US" sz="1100" dirty="0">
+                        <a:latin typeface="Calibri" charset="0"/>
+                        <a:ea typeface="Calibri" charset="0"/>
+                        <a:cs typeface="Calibri" charset="0"/>
+                      </a:endParaRPr>
+                    </a:p>
+                  </a:txBody>
+                  <a:tcPr marL="91440" marR="91440" marT="45720" marB="45720">
+                    <a:lnL w="6350" cap="flat" cmpd="sng" algn="ctr">
+                      <a:solidFill>
+                        <a:srgbClr val="E5E7EB"/>
+                      </a:solidFill>
+                      <a:prstDash val="solid"/>
+                      <a:round/>
+                      <a:headEnd type="none" w="med" len="med"/>
+                      <a:tailEnd type="none" w="med" len="med"/>
+                    </a:lnL>
+                    <a:lnR w="6350" cap="flat" cmpd="sng" algn="ctr">
+                      <a:solidFill>
+                        <a:srgbClr val="E5E7EB"/>
+                      </a:solidFill>
+                      <a:prstDash val="solid"/>
+                      <a:round/>
+                      <a:headEnd type="none" w="med" len="med"/>
+                      <a:tailEnd type="none" w="med" len="med"/>
+                    </a:lnR>
+                    <a:lnT w="6350" cap="flat" cmpd="sng" algn="ctr">
+                      <a:solidFill>
+                        <a:srgbClr val="E5E7EB"/>
+                      </a:solidFill>
+                      <a:prstDash val="solid"/>
+                      <a:round/>
+                      <a:headEnd type="none" w="med" len="med"/>
+                      <a:tailEnd type="none" w="med" len="med"/>
+                    </a:lnT>
+                    <a:lnB w="6350" cap="flat" cmpd="sng" algn="ctr">
+                      <a:solidFill>
+                        <a:srgbClr val="E5E7EB"/>
+                      </a:solidFill>
+                      <a:prstDash val="solid"/>
+                      <a:round/>
+                      <a:headEnd type="none" w="med" len="med"/>
+                      <a:tailEnd type="none" w="med" len="med"/>
+                    </a:lnB>
+                    <a:solidFill>
+                      <a:srgbClr val="1B2E5E"/>
+                    </a:solidFill>
+                  </a:tcPr>
+                </a:tc>
+                <a:tc>
+                  <a:txBody>
+                    <a:bodyPr/>
+                    <a:lstStyle/>
+                    <a:p>
+                      <a:pPr algn="ctr" indent="0" marL="0">
+                        <a:buNone/>
+                      </a:pPr>
+                      <a:r>
+                        <a:rPr lang="en-US" sz="1100" b="1" dirty="0">
+                          <a:solidFill>
+                            <a:srgbClr val="FFFFFF"/>
+                          </a:solidFill>
+                          <a:latin typeface="Calibri" pitchFamily="34" charset="0"/>
+                          <a:ea typeface="Calibri" pitchFamily="34" charset="-122"/>
+                          <a:cs typeface="Calibri" pitchFamily="34" charset="-120"/>
+                        </a:rPr>
+                        <a:t>Reducc. %</a:t>
+                      </a:r>
+                      <a:endParaRPr lang="en-US" sz="1100" dirty="0">
+                        <a:latin typeface="Calibri" charset="0"/>
+                        <a:ea typeface="Calibri" charset="0"/>
+                        <a:cs typeface="Calibri" charset="0"/>
+                      </a:endParaRPr>
+                    </a:p>
+                  </a:txBody>
+                  <a:tcPr marL="91440" marR="91440" marT="45720" marB="45720">
+                    <a:lnL w="6350" cap="flat" cmpd="sng" algn="ctr">
+                      <a:solidFill>
+                        <a:srgbClr val="E5E7EB"/>
+                      </a:solidFill>
+                      <a:prstDash val="solid"/>
+                      <a:round/>
+                      <a:headEnd type="none" w="med" len="med"/>
+                      <a:tailEnd type="none" w="med" len="med"/>
+                    </a:lnL>
+                    <a:lnR w="6350" cap="flat" cmpd="sng" algn="ctr">
+                      <a:solidFill>
+                        <a:srgbClr val="E5E7EB"/>
+                      </a:solidFill>
+                      <a:prstDash val="solid"/>
+                      <a:round/>
+                      <a:headEnd type="none" w="med" len="med"/>
+                      <a:tailEnd type="none" w="med" len="med"/>
+                    </a:lnR>
+                    <a:lnT w="6350" cap="flat" cmpd="sng" algn="ctr">
+                      <a:solidFill>
+                        <a:srgbClr val="E5E7EB"/>
+                      </a:solidFill>
+                      <a:prstDash val="solid"/>
+                      <a:round/>
+                      <a:headEnd type="none" w="med" len="med"/>
+                      <a:tailEnd type="none" w="med" len="med"/>
+                    </a:lnT>
+                    <a:lnB w="6350" cap="flat" cmpd="sng" algn="ctr">
+                      <a:solidFill>
+                        <a:srgbClr val="E5E7EB"/>
+                      </a:solidFill>
+                      <a:prstDash val="solid"/>
+                      <a:round/>
+                      <a:headEnd type="none" w="med" len="med"/>
+                      <a:tailEnd type="none" w="med" len="med"/>
+                    </a:lnB>
+                    <a:solidFill>
+                      <a:srgbClr val="1B2E5E"/>
+                    </a:solidFill>
+                  </a:tcPr>
+                </a:tc>
+              </a:tr>
+              <a:tr h="393192">
+                <a:tc>
+                  <a:txBody>
+                    <a:bodyPr/>
+                    <a:lstStyle/>
+                    <a:p>
+                      <a:pPr indent="0" marL="0">
+                        <a:buNone/>
+                      </a:pPr>
+                      <a:r>
+                        <a:rPr lang="en-US" sz="1000" dirty="0">
+                          <a:solidFill>
+                            <a:srgbClr val="000000"/>
+                          </a:solidFill>
+                          <a:latin typeface="Calibri" pitchFamily="34" charset="0"/>
+                          <a:ea typeface="Calibri" pitchFamily="34" charset="-122"/>
+                          <a:cs typeface="Calibri" pitchFamily="34" charset="-120"/>
+                        </a:rPr>
+                        <a:t>Papelería</a:t>
+                      </a:r>
+                      <a:endParaRPr lang="en-US" sz="1000" dirty="0">
+                        <a:latin typeface="Calibri" charset="0"/>
+                        <a:ea typeface="Calibri" charset="0"/>
+                        <a:cs typeface="Calibri" charset="0"/>
+                      </a:endParaRPr>
+                    </a:p>
+                  </a:txBody>
+                  <a:tcPr marL="91440" marR="91440" marT="45720" marB="45720">
+                    <a:lnL w="6350" cap="flat" cmpd="sng" algn="ctr">
+                      <a:solidFill>
+                        <a:srgbClr val="E5E7EB"/>
+                      </a:solidFill>
+                      <a:prstDash val="solid"/>
+                      <a:round/>
+                      <a:headEnd type="none" w="med" len="med"/>
+                      <a:tailEnd type="none" w="med" len="med"/>
+                    </a:lnL>
+                    <a:lnR w="6350" cap="flat" cmpd="sng" algn="ctr">
+                      <a:solidFill>
+                        <a:srgbClr val="E5E7EB"/>
+                      </a:solidFill>
+                      <a:prstDash val="solid"/>
+                      <a:round/>
+                      <a:headEnd type="none" w="med" len="med"/>
+                      <a:tailEnd type="none" w="med" len="med"/>
+                    </a:lnR>
+                    <a:lnT w="6350" cap="flat" cmpd="sng" algn="ctr">
+                      <a:solidFill>
+                        <a:srgbClr val="E5E7EB"/>
+                      </a:solidFill>
+                      <a:prstDash val="solid"/>
+                      <a:round/>
+                      <a:headEnd type="none" w="med" len="med"/>
+                      <a:tailEnd type="none" w="med" len="med"/>
+                    </a:lnT>
+                    <a:lnB w="6350" cap="flat" cmpd="sng" algn="ctr">
+                      <a:solidFill>
+                        <a:srgbClr val="E5E7EB"/>
+                      </a:solidFill>
+                      <a:prstDash val="solid"/>
+                      <a:round/>
+                      <a:headEnd type="none" w="med" len="med"/>
+                      <a:tailEnd type="none" w="med" len="med"/>
+                    </a:lnB>
+                    <a:solidFill>
+                      <a:srgbClr val="FFFFFF"/>
+                    </a:solidFill>
+                  </a:tcPr>
+                </a:tc>
+                <a:tc>
+                  <a:txBody>
+                    <a:bodyPr/>
+                    <a:lstStyle/>
+                    <a:p>
+                      <a:pPr algn="ctr" indent="0" marL="0">
+                        <a:buNone/>
+                      </a:pPr>
+                      <a:r>
+                        <a:rPr lang="en-US" sz="1000" b="1" dirty="0">
+                          <a:solidFill>
+                            <a:srgbClr val="22A45D"/>
+                          </a:solidFill>
+                          <a:latin typeface="Calibri" pitchFamily="34" charset="0"/>
+                          <a:ea typeface="Calibri" pitchFamily="34" charset="-122"/>
+                          <a:cs typeface="Calibri" pitchFamily="34" charset="-120"/>
+                        </a:rPr>
+                        <a:t>$10.345</a:t>
+                      </a:r>
+                      <a:endParaRPr lang="en-US" sz="1000" dirty="0">
+                        <a:latin typeface="Calibri" charset="0"/>
+                        <a:ea typeface="Calibri" charset="0"/>
+                        <a:cs typeface="Calibri" charset="0"/>
+                      </a:endParaRPr>
+                    </a:p>
+                  </a:txBody>
+                  <a:tcPr marL="91440" marR="91440" marT="45720" marB="45720">
+                    <a:lnL w="6350" cap="flat" cmpd="sng" algn="ctr">
+                      <a:solidFill>
+                        <a:srgbClr val="E5E7EB"/>
+                      </a:solidFill>
+                      <a:prstDash val="solid"/>
+                      <a:round/>
+                      <a:headEnd type="none" w="med" len="med"/>
+                      <a:tailEnd type="none" w="med" len="med"/>
+                    </a:lnL>
+                    <a:lnR w="6350" cap="flat" cmpd="sng" algn="ctr">
+                      <a:solidFill>
+                        <a:srgbClr val="E5E7EB"/>
+                      </a:solidFill>
+                      <a:prstDash val="solid"/>
+                      <a:round/>
+                      <a:headEnd type="none" w="med" len="med"/>
+                      <a:tailEnd type="none" w="med" len="med"/>
+                    </a:lnR>
+                    <a:lnT w="6350" cap="flat" cmpd="sng" algn="ctr">
+                      <a:solidFill>
+                        <a:srgbClr val="E5E7EB"/>
+                      </a:solidFill>
+                      <a:prstDash val="solid"/>
+                      <a:round/>
+                      <a:headEnd type="none" w="med" len="med"/>
+                      <a:tailEnd type="none" w="med" len="med"/>
+                    </a:lnT>
+                    <a:lnB w="6350" cap="flat" cmpd="sng" algn="ctr">
+                      <a:solidFill>
+                        <a:srgbClr val="E5E7EB"/>
+                      </a:solidFill>
+                      <a:prstDash val="solid"/>
+                      <a:round/>
+                      <a:headEnd type="none" w="med" len="med"/>
+                      <a:tailEnd type="none" w="med" len="med"/>
+                    </a:lnB>
+                    <a:solidFill>
+                      <a:srgbClr val="FFFFFF"/>
+                    </a:solidFill>
+                  </a:tcPr>
+                </a:tc>
+                <a:tc>
+                  <a:txBody>
+                    <a:bodyPr/>
+                    <a:lstStyle/>
+                    <a:p>
+                      <a:pPr algn="ctr" indent="0" marL="0">
+                        <a:buNone/>
+                      </a:pPr>
+                      <a:r>
+                        <a:rPr lang="en-US" sz="1100" b="1" dirty="0">
+                          <a:solidFill>
+                            <a:srgbClr val="22A45D"/>
+                          </a:solidFill>
+                          <a:latin typeface="Calibri" pitchFamily="34" charset="0"/>
+                          <a:ea typeface="Calibri" pitchFamily="34" charset="-122"/>
+                          <a:cs typeface="Calibri" pitchFamily="34" charset="-120"/>
+                        </a:rPr>
+                        <a:t>49.0%</a:t>
+                      </a:r>
+                      <a:endParaRPr lang="en-US" sz="1100" dirty="0">
+                        <a:latin typeface="Calibri" charset="0"/>
+                        <a:ea typeface="Calibri" charset="0"/>
+                        <a:cs typeface="Calibri" charset="0"/>
+                      </a:endParaRPr>
+                    </a:p>
+                  </a:txBody>
+                  <a:tcPr marL="91440" marR="91440" marT="45720" marB="45720">
+                    <a:lnL w="6350" cap="flat" cmpd="sng" algn="ctr">
+                      <a:solidFill>
+                        <a:srgbClr val="E5E7EB"/>
+                      </a:solidFill>
+                      <a:prstDash val="solid"/>
+                      <a:round/>
+                      <a:headEnd type="none" w="med" len="med"/>
+                      <a:tailEnd type="none" w="med" len="med"/>
+                    </a:lnL>
+                    <a:lnR w="6350" cap="flat" cmpd="sng" algn="ctr">
+                      <a:solidFill>
+                        <a:srgbClr val="E5E7EB"/>
+                      </a:solidFill>
+                      <a:prstDash val="solid"/>
+                      <a:round/>
+                      <a:headEnd type="none" w="med" len="med"/>
+                      <a:tailEnd type="none" w="med" len="med"/>
+                    </a:lnR>
+                    <a:lnT w="6350" cap="flat" cmpd="sng" algn="ctr">
+                      <a:solidFill>
+                        <a:srgbClr val="E5E7EB"/>
+                      </a:solidFill>
+                      <a:prstDash val="solid"/>
+                      <a:round/>
+                      <a:headEnd type="none" w="med" len="med"/>
+                      <a:tailEnd type="none" w="med" len="med"/>
+                    </a:lnT>
+                    <a:lnB w="6350" cap="flat" cmpd="sng" algn="ctr">
+                      <a:solidFill>
+                        <a:srgbClr val="E5E7EB"/>
+                      </a:solidFill>
+                      <a:prstDash val="solid"/>
+                      <a:round/>
+                      <a:headEnd type="none" w="med" len="med"/>
+                      <a:tailEnd type="none" w="med" len="med"/>
+                    </a:lnB>
+                    <a:solidFill>
+                      <a:srgbClr val="FFFFFF"/>
+                    </a:solidFill>
+                  </a:tcPr>
+                </a:tc>
+              </a:tr>
+              <a:tr h="393192">
+                <a:tc>
+                  <a:txBody>
+                    <a:bodyPr/>
+                    <a:lstStyle/>
+                    <a:p>
+                      <a:pPr indent="0" marL="0">
+                        <a:buNone/>
+                      </a:pPr>
+                      <a:r>
+                        <a:rPr lang="en-US" sz="1000" dirty="0">
+                          <a:solidFill>
+                            <a:srgbClr val="000000"/>
+                          </a:solidFill>
+                          <a:latin typeface="Calibri" pitchFamily="34" charset="0"/>
+                          <a:ea typeface="Calibri" pitchFamily="34" charset="-122"/>
+                          <a:cs typeface="Calibri" pitchFamily="34" charset="-120"/>
+                        </a:rPr>
+                        <a:t>Cartelería</a:t>
+                      </a:r>
+                      <a:endParaRPr lang="en-US" sz="1000" dirty="0">
+                        <a:latin typeface="Calibri" charset="0"/>
+                        <a:ea typeface="Calibri" charset="0"/>
+                        <a:cs typeface="Calibri" charset="0"/>
+                      </a:endParaRPr>
+                    </a:p>
+                  </a:txBody>
+                  <a:tcPr marL="91440" marR="91440" marT="45720" marB="45720">
+                    <a:lnL w="6350" cap="flat" cmpd="sng" algn="ctr">
+                      <a:solidFill>
+                        <a:srgbClr val="E5E7EB"/>
+                      </a:solidFill>
+                      <a:prstDash val="solid"/>
+                      <a:round/>
+                      <a:headEnd type="none" w="med" len="med"/>
+                      <a:tailEnd type="none" w="med" len="med"/>
+                    </a:lnL>
+                    <a:lnR w="6350" cap="flat" cmpd="sng" algn="ctr">
+                      <a:solidFill>
+                        <a:srgbClr val="E5E7EB"/>
+                      </a:solidFill>
+                      <a:prstDash val="solid"/>
+                      <a:round/>
+                      <a:headEnd type="none" w="med" len="med"/>
+                      <a:tailEnd type="none" w="med" len="med"/>
+                    </a:lnR>
+                    <a:lnT w="6350" cap="flat" cmpd="sng" algn="ctr">
+                      <a:solidFill>
+                        <a:srgbClr val="E5E7EB"/>
+                      </a:solidFill>
+                      <a:prstDash val="solid"/>
+                      <a:round/>
+                      <a:headEnd type="none" w="med" len="med"/>
+                      <a:tailEnd type="none" w="med" len="med"/>
+                    </a:lnT>
+                    <a:lnB w="6350" cap="flat" cmpd="sng" algn="ctr">
+                      <a:solidFill>
+                        <a:srgbClr val="E5E7EB"/>
+                      </a:solidFill>
+                      <a:prstDash val="solid"/>
+                      <a:round/>
+                      <a:headEnd type="none" w="med" len="med"/>
+                      <a:tailEnd type="none" w="med" len="med"/>
+                    </a:lnB>
+                    <a:solidFill>
+                      <a:srgbClr val="F0FDF4"/>
+                    </a:solidFill>
+                  </a:tcPr>
+                </a:tc>
+                <a:tc>
+                  <a:txBody>
+                    <a:bodyPr/>
+                    <a:lstStyle/>
+                    <a:p>
+                      <a:pPr algn="ctr" indent="0" marL="0">
+                        <a:buNone/>
+                      </a:pPr>
+                      <a:r>
+                        <a:rPr lang="en-US" sz="1000" b="1" dirty="0">
+                          <a:solidFill>
+                            <a:srgbClr val="22A45D"/>
+                          </a:solidFill>
+                          <a:latin typeface="Calibri" pitchFamily="34" charset="0"/>
+                          <a:ea typeface="Calibri" pitchFamily="34" charset="-122"/>
+                          <a:cs typeface="Calibri" pitchFamily="34" charset="-120"/>
+                        </a:rPr>
+                        <a:t>$355.972</a:t>
+                      </a:r>
+                      <a:endParaRPr lang="en-US" sz="1000" dirty="0">
+                        <a:latin typeface="Calibri" charset="0"/>
+                        <a:ea typeface="Calibri" charset="0"/>
+                        <a:cs typeface="Calibri" charset="0"/>
+                      </a:endParaRPr>
+                    </a:p>
+                  </a:txBody>
+                  <a:tcPr marL="91440" marR="91440" marT="45720" marB="45720">
+                    <a:lnL w="6350" cap="flat" cmpd="sng" algn="ctr">
+                      <a:solidFill>
+                        <a:srgbClr val="E5E7EB"/>
+                      </a:solidFill>
+                      <a:prstDash val="solid"/>
+                      <a:round/>
+                      <a:headEnd type="none" w="med" len="med"/>
+                      <a:tailEnd type="none" w="med" len="med"/>
+                    </a:lnL>
+                    <a:lnR w="6350" cap="flat" cmpd="sng" algn="ctr">
+                      <a:solidFill>
+                        <a:srgbClr val="E5E7EB"/>
+                      </a:solidFill>
+                      <a:prstDash val="solid"/>
+                      <a:round/>
+                      <a:headEnd type="none" w="med" len="med"/>
+                      <a:tailEnd type="none" w="med" len="med"/>
+                    </a:lnR>
+                    <a:lnT w="6350" cap="flat" cmpd="sng" algn="ctr">
+                      <a:solidFill>
+                        <a:srgbClr val="E5E7EB"/>
+                      </a:solidFill>
+                      <a:prstDash val="solid"/>
+                      <a:round/>
+                      <a:headEnd type="none" w="med" len="med"/>
+                      <a:tailEnd type="none" w="med" len="med"/>
+                    </a:lnT>
+                    <a:lnB w="6350" cap="flat" cmpd="sng" algn="ctr">
+                      <a:solidFill>
+                        <a:srgbClr val="E5E7EB"/>
+                      </a:solidFill>
+                      <a:prstDash val="solid"/>
+                      <a:round/>
+                      <a:headEnd type="none" w="med" len="med"/>
+                      <a:tailEnd type="none" w="med" len="med"/>
+                    </a:lnB>
+                    <a:solidFill>
+                      <a:srgbClr val="F0FDF4"/>
+                    </a:solidFill>
+                  </a:tcPr>
+                </a:tc>
+                <a:tc>
+                  <a:txBody>
+                    <a:bodyPr/>
+                    <a:lstStyle/>
+                    <a:p>
+                      <a:pPr algn="ctr" indent="0" marL="0">
+                        <a:buNone/>
+                      </a:pPr>
+                      <a:r>
+                        <a:rPr lang="en-US" sz="1100" b="1" dirty="0">
+                          <a:solidFill>
+                            <a:srgbClr val="22A45D"/>
+                          </a:solidFill>
+                          <a:latin typeface="Calibri" pitchFamily="34" charset="0"/>
+                          <a:ea typeface="Calibri" pitchFamily="34" charset="-122"/>
+                          <a:cs typeface="Calibri" pitchFamily="34" charset="-120"/>
+                        </a:rPr>
+                        <a:t>44.6%</a:t>
+                      </a:r>
+                      <a:endParaRPr lang="en-US" sz="1100" dirty="0">
+                        <a:latin typeface="Calibri" charset="0"/>
+                        <a:ea typeface="Calibri" charset="0"/>
+                        <a:cs typeface="Calibri" charset="0"/>
+                      </a:endParaRPr>
+                    </a:p>
+                  </a:txBody>
+                  <a:tcPr marL="91440" marR="91440" marT="45720" marB="45720">
+                    <a:lnL w="6350" cap="flat" cmpd="sng" algn="ctr">
+                      <a:solidFill>
+                        <a:srgbClr val="E5E7EB"/>
+                      </a:solidFill>
+                      <a:prstDash val="solid"/>
+                      <a:round/>
+                      <a:headEnd type="none" w="med" len="med"/>
+                      <a:tailEnd type="none" w="med" len="med"/>
+                    </a:lnL>
+                    <a:lnR w="6350" cap="flat" cmpd="sng" algn="ctr">
+                      <a:solidFill>
+                        <a:srgbClr val="E5E7EB"/>
+                      </a:solidFill>
+                      <a:prstDash val="solid"/>
+                      <a:round/>
+                      <a:headEnd type="none" w="med" len="med"/>
+                      <a:tailEnd type="none" w="med" len="med"/>
+                    </a:lnR>
+                    <a:lnT w="6350" cap="flat" cmpd="sng" algn="ctr">
+                      <a:solidFill>
+                        <a:srgbClr val="E5E7EB"/>
+                      </a:solidFill>
+                      <a:prstDash val="solid"/>
+                      <a:round/>
+                      <a:headEnd type="none" w="med" len="med"/>
+                      <a:tailEnd type="none" w="med" len="med"/>
+                    </a:lnT>
+                    <a:lnB w="6350" cap="flat" cmpd="sng" algn="ctr">
+                      <a:solidFill>
+                        <a:srgbClr val="E5E7EB"/>
+                      </a:solidFill>
+                      <a:prstDash val="solid"/>
+                      <a:round/>
+                      <a:headEnd type="none" w="med" len="med"/>
+                      <a:tailEnd type="none" w="med" len="med"/>
+                    </a:lnB>
+                    <a:solidFill>
+                      <a:srgbClr val="F0FDF4"/>
+                    </a:solidFill>
+                  </a:tcPr>
+                </a:tc>
+              </a:tr>
+              <a:tr h="393192">
+                <a:tc>
+                  <a:txBody>
+                    <a:bodyPr/>
+                    <a:lstStyle/>
+                    <a:p>
+                      <a:pPr indent="0" marL="0">
+                        <a:buNone/>
+                      </a:pPr>
+                      <a:r>
+                        <a:rPr lang="en-US" sz="1000" dirty="0">
+                          <a:solidFill>
+                            <a:srgbClr val="000000"/>
+                          </a:solidFill>
+                          <a:latin typeface="Calibri" pitchFamily="34" charset="0"/>
+                          <a:ea typeface="Calibri" pitchFamily="34" charset="-122"/>
+                          <a:cs typeface="Calibri" pitchFamily="34" charset="-120"/>
+                        </a:rPr>
+                        <a:t>Vinilos p/ Vidrios</a:t>
+                      </a:r>
+                      <a:endParaRPr lang="en-US" sz="1000" dirty="0">
+                        <a:latin typeface="Calibri" charset="0"/>
+                        <a:ea typeface="Calibri" charset="0"/>
+                        <a:cs typeface="Calibri" charset="0"/>
+                      </a:endParaRPr>
+                    </a:p>
+                  </a:txBody>
+                  <a:tcPr marL="91440" marR="91440" marT="45720" marB="45720">
+                    <a:lnL w="6350" cap="flat" cmpd="sng" algn="ctr">
+                      <a:solidFill>
+                        <a:srgbClr val="E5E7EB"/>
+                      </a:solidFill>
+                      <a:prstDash val="solid"/>
+                      <a:round/>
+                      <a:headEnd type="none" w="med" len="med"/>
+                      <a:tailEnd type="none" w="med" len="med"/>
+                    </a:lnL>
+                    <a:lnR w="6350" cap="flat" cmpd="sng" algn="ctr">
+                      <a:solidFill>
+                        <a:srgbClr val="E5E7EB"/>
+                      </a:solidFill>
+                      <a:prstDash val="solid"/>
+                      <a:round/>
+                      <a:headEnd type="none" w="med" len="med"/>
+                      <a:tailEnd type="none" w="med" len="med"/>
+                    </a:lnR>
+                    <a:lnT w="6350" cap="flat" cmpd="sng" algn="ctr">
+                      <a:solidFill>
+                        <a:srgbClr val="E5E7EB"/>
+                      </a:solidFill>
+                      <a:prstDash val="solid"/>
+                      <a:round/>
+                      <a:headEnd type="none" w="med" len="med"/>
+                      <a:tailEnd type="none" w="med" len="med"/>
+                    </a:lnT>
+                    <a:lnB w="6350" cap="flat" cmpd="sng" algn="ctr">
+                      <a:solidFill>
+                        <a:srgbClr val="E5E7EB"/>
+                      </a:solidFill>
+                      <a:prstDash val="solid"/>
+                      <a:round/>
+                      <a:headEnd type="none" w="med" len="med"/>
+                      <a:tailEnd type="none" w="med" len="med"/>
+                    </a:lnB>
+                    <a:solidFill>
+                      <a:srgbClr val="FFFFFF"/>
+                    </a:solidFill>
+                  </a:tcPr>
+                </a:tc>
+                <a:tc>
+                  <a:txBody>
+                    <a:bodyPr/>
+                    <a:lstStyle/>
+                    <a:p>
+                      <a:pPr algn="ctr" indent="0" marL="0">
+                        <a:buNone/>
+                      </a:pPr>
+                      <a:r>
+                        <a:rPr lang="en-US" sz="1000" b="1" dirty="0">
+                          <a:solidFill>
+                            <a:srgbClr val="22A45D"/>
+                          </a:solidFill>
+                          <a:latin typeface="Calibri" pitchFamily="34" charset="0"/>
+                          <a:ea typeface="Calibri" pitchFamily="34" charset="-122"/>
+                          <a:cs typeface="Calibri" pitchFamily="34" charset="-120"/>
+                        </a:rPr>
+                        <a:t>$15.807</a:t>
+                      </a:r>
+                      <a:endParaRPr lang="en-US" sz="1000" dirty="0">
+                        <a:latin typeface="Calibri" charset="0"/>
+                        <a:ea typeface="Calibri" charset="0"/>
+                        <a:cs typeface="Calibri" charset="0"/>
+                      </a:endParaRPr>
+                    </a:p>
+                  </a:txBody>
+                  <a:tcPr marL="91440" marR="91440" marT="45720" marB="45720">
+                    <a:lnL w="6350" cap="flat" cmpd="sng" algn="ctr">
+                      <a:solidFill>
+                        <a:srgbClr val="E5E7EB"/>
+                      </a:solidFill>
+                      <a:prstDash val="solid"/>
+                      <a:round/>
+                      <a:headEnd type="none" w="med" len="med"/>
+                      <a:tailEnd type="none" w="med" len="med"/>
+                    </a:lnL>
+                    <a:lnR w="6350" cap="flat" cmpd="sng" algn="ctr">
+                      <a:solidFill>
+                        <a:srgbClr val="E5E7EB"/>
+                      </a:solidFill>
+                      <a:prstDash val="solid"/>
+                      <a:round/>
+                      <a:headEnd type="none" w="med" len="med"/>
+                      <a:tailEnd type="none" w="med" len="med"/>
+                    </a:lnR>
+                    <a:lnT w="6350" cap="flat" cmpd="sng" algn="ctr">
+                      <a:solidFill>
+                        <a:srgbClr val="E5E7EB"/>
+                      </a:solidFill>
+                      <a:prstDash val="solid"/>
+                      <a:round/>
+                      <a:headEnd type="none" w="med" len="med"/>
+                      <a:tailEnd type="none" w="med" len="med"/>
+                    </a:lnT>
+                    <a:lnB w="6350" cap="flat" cmpd="sng" algn="ctr">
+                      <a:solidFill>
+                        <a:srgbClr val="E5E7EB"/>
+                      </a:solidFill>
+                      <a:prstDash val="solid"/>
+                      <a:round/>
+                      <a:headEnd type="none" w="med" len="med"/>
+                      <a:tailEnd type="none" w="med" len="med"/>
+                    </a:lnB>
+                    <a:solidFill>
+                      <a:srgbClr val="FFFFFF"/>
+                    </a:solidFill>
+                  </a:tcPr>
+                </a:tc>
+                <a:tc>
+                  <a:txBody>
+                    <a:bodyPr/>
+                    <a:lstStyle/>
+                    <a:p>
+                      <a:pPr algn="ctr" indent="0" marL="0">
+                        <a:buNone/>
+                      </a:pPr>
+                      <a:r>
+                        <a:rPr lang="en-US" sz="1100" b="1" dirty="0">
+                          <a:solidFill>
+                            <a:srgbClr val="22A45D"/>
+                          </a:solidFill>
+                          <a:latin typeface="Calibri" pitchFamily="34" charset="0"/>
+                          <a:ea typeface="Calibri" pitchFamily="34" charset="-122"/>
+                          <a:cs typeface="Calibri" pitchFamily="34" charset="-120"/>
+                        </a:rPr>
+                        <a:t>32.0%</a:t>
+                      </a:r>
+                      <a:endParaRPr lang="en-US" sz="1100" dirty="0">
+                        <a:latin typeface="Calibri" charset="0"/>
+                        <a:ea typeface="Calibri" charset="0"/>
+                        <a:cs typeface="Calibri" charset="0"/>
+                      </a:endParaRPr>
+                    </a:p>
+                  </a:txBody>
+                  <a:tcPr marL="91440" marR="91440" marT="45720" marB="45720">
+                    <a:lnL w="6350" cap="flat" cmpd="sng" algn="ctr">
+                      <a:solidFill>
+                        <a:srgbClr val="E5E7EB"/>
+                      </a:solidFill>
+                      <a:prstDash val="solid"/>
+                      <a:round/>
+                      <a:headEnd type="none" w="med" len="med"/>
+                      <a:tailEnd type="none" w="med" len="med"/>
+                    </a:lnL>
+                    <a:lnR w="6350" cap="flat" cmpd="sng" algn="ctr">
+                      <a:solidFill>
+                        <a:srgbClr val="E5E7EB"/>
+                      </a:solidFill>
+                      <a:prstDash val="solid"/>
+                      <a:round/>
+                      <a:headEnd type="none" w="med" len="med"/>
+                      <a:tailEnd type="none" w="med" len="med"/>
+                    </a:lnR>
+                    <a:lnT w="6350" cap="flat" cmpd="sng" algn="ctr">
+                      <a:solidFill>
+                        <a:srgbClr val="E5E7EB"/>
+                      </a:solidFill>
+                      <a:prstDash val="solid"/>
+                      <a:round/>
+                      <a:headEnd type="none" w="med" len="med"/>
+                      <a:tailEnd type="none" w="med" len="med"/>
+                    </a:lnT>
+                    <a:lnB w="6350" cap="flat" cmpd="sng" algn="ctr">
+                      <a:solidFill>
+                        <a:srgbClr val="E5E7EB"/>
+                      </a:solidFill>
+                      <a:prstDash val="solid"/>
+                      <a:round/>
+                      <a:headEnd type="none" w="med" len="med"/>
+                      <a:tailEnd type="none" w="med" len="med"/>
+                    </a:lnB>
+                    <a:solidFill>
+                      <a:srgbClr val="FFFFFF"/>
+                    </a:solidFill>
+                  </a:tcPr>
+                </a:tc>
+              </a:tr>
+              <a:tr h="393192">
+                <a:tc>
+                  <a:txBody>
+                    <a:bodyPr/>
+                    <a:lstStyle/>
+                    <a:p>
+                      <a:pPr indent="0" marL="0">
+                        <a:buNone/>
+                      </a:pPr>
+                      <a:r>
+                        <a:rPr lang="en-US" sz="1000" dirty="0">
+                          <a:solidFill>
+                            <a:srgbClr val="000000"/>
+                          </a:solidFill>
+                          <a:latin typeface="Calibri" pitchFamily="34" charset="0"/>
+                          <a:ea typeface="Calibri" pitchFamily="34" charset="-122"/>
+                          <a:cs typeface="Calibri" pitchFamily="34" charset="-120"/>
+                        </a:rPr>
+                        <a:t>Automotor</a:t>
+                      </a:r>
+                      <a:endParaRPr lang="en-US" sz="1000" dirty="0">
+                        <a:latin typeface="Calibri" charset="0"/>
+                        <a:ea typeface="Calibri" charset="0"/>
+                        <a:cs typeface="Calibri" charset="0"/>
+                      </a:endParaRPr>
+                    </a:p>
+                  </a:txBody>
+                  <a:tcPr marL="91440" marR="91440" marT="45720" marB="45720">
+                    <a:lnL w="6350" cap="flat" cmpd="sng" algn="ctr">
+                      <a:solidFill>
+                        <a:srgbClr val="E5E7EB"/>
+                      </a:solidFill>
+                      <a:prstDash val="solid"/>
+                      <a:round/>
+                      <a:headEnd type="none" w="med" len="med"/>
+                      <a:tailEnd type="none" w="med" len="med"/>
+                    </a:lnL>
+                    <a:lnR w="6350" cap="flat" cmpd="sng" algn="ctr">
+                      <a:solidFill>
+                        <a:srgbClr val="E5E7EB"/>
+                      </a:solidFill>
+                      <a:prstDash val="solid"/>
+                      <a:round/>
+                      <a:headEnd type="none" w="med" len="med"/>
+                      <a:tailEnd type="none" w="med" len="med"/>
+                    </a:lnR>
+                    <a:lnT w="6350" cap="flat" cmpd="sng" algn="ctr">
+                      <a:solidFill>
+                        <a:srgbClr val="E5E7EB"/>
+                      </a:solidFill>
+                      <a:prstDash val="solid"/>
+                      <a:round/>
+                      <a:headEnd type="none" w="med" len="med"/>
+                      <a:tailEnd type="none" w="med" len="med"/>
+                    </a:lnT>
+                    <a:lnB w="6350" cap="flat" cmpd="sng" algn="ctr">
+                      <a:solidFill>
+                        <a:srgbClr val="E5E7EB"/>
+                      </a:solidFill>
+                      <a:prstDash val="solid"/>
+                      <a:round/>
+                      <a:headEnd type="none" w="med" len="med"/>
+                      <a:tailEnd type="none" w="med" len="med"/>
+                    </a:lnB>
+                    <a:solidFill>
+                      <a:srgbClr val="F0FDF4"/>
+                    </a:solidFill>
+                  </a:tcPr>
+                </a:tc>
+                <a:tc>
+                  <a:txBody>
+                    <a:bodyPr/>
+                    <a:lstStyle/>
+                    <a:p>
+                      <a:pPr algn="ctr" indent="0" marL="0">
+                        <a:buNone/>
+                      </a:pPr>
+                      <a:r>
+                        <a:rPr lang="en-US" sz="1000" b="1" dirty="0">
+                          <a:solidFill>
+                            <a:srgbClr val="22A45D"/>
+                          </a:solidFill>
+                          <a:latin typeface="Calibri" pitchFamily="34" charset="0"/>
+                          <a:ea typeface="Calibri" pitchFamily="34" charset="-122"/>
+                          <a:cs typeface="Calibri" pitchFamily="34" charset="-120"/>
+                        </a:rPr>
+                        <a:t>$3.885</a:t>
+                      </a:r>
+                      <a:endParaRPr lang="en-US" sz="1000" dirty="0">
+                        <a:latin typeface="Calibri" charset="0"/>
+                        <a:ea typeface="Calibri" charset="0"/>
+                        <a:cs typeface="Calibri" charset="0"/>
+                      </a:endParaRPr>
+                    </a:p>
+                  </a:txBody>
+                  <a:tcPr marL="91440" marR="91440" marT="45720" marB="45720">
+                    <a:lnL w="6350" cap="flat" cmpd="sng" algn="ctr">
+                      <a:solidFill>
+                        <a:srgbClr val="E5E7EB"/>
+                      </a:solidFill>
+                      <a:prstDash val="solid"/>
+                      <a:round/>
+                      <a:headEnd type="none" w="med" len="med"/>
+                      <a:tailEnd type="none" w="med" len="med"/>
+                    </a:lnL>
+                    <a:lnR w="6350" cap="flat" cmpd="sng" algn="ctr">
+                      <a:solidFill>
+                        <a:srgbClr val="E5E7EB"/>
+                      </a:solidFill>
+                      <a:prstDash val="solid"/>
+                      <a:round/>
+                      <a:headEnd type="none" w="med" len="med"/>
+                      <a:tailEnd type="none" w="med" len="med"/>
+                    </a:lnR>
+                    <a:lnT w="6350" cap="flat" cmpd="sng" algn="ctr">
+                      <a:solidFill>
+                        <a:srgbClr val="E5E7EB"/>
+                      </a:solidFill>
+                      <a:prstDash val="solid"/>
+                      <a:round/>
+                      <a:headEnd type="none" w="med" len="med"/>
+                      <a:tailEnd type="none" w="med" len="med"/>
+                    </a:lnT>
+                    <a:lnB w="6350" cap="flat" cmpd="sng" algn="ctr">
+                      <a:solidFill>
+                        <a:srgbClr val="E5E7EB"/>
+                      </a:solidFill>
+                      <a:prstDash val="solid"/>
+                      <a:round/>
+                      <a:headEnd type="none" w="med" len="med"/>
+                      <a:tailEnd type="none" w="med" len="med"/>
+                    </a:lnB>
+                    <a:solidFill>
+                      <a:srgbClr val="F0FDF4"/>
+                    </a:solidFill>
+                  </a:tcPr>
+                </a:tc>
+                <a:tc>
+                  <a:txBody>
+                    <a:bodyPr/>
+                    <a:lstStyle/>
+                    <a:p>
+                      <a:pPr algn="ctr" indent="0" marL="0">
+                        <a:buNone/>
+                      </a:pPr>
+                      <a:r>
+                        <a:rPr lang="en-US" sz="1100" b="1" dirty="0">
+                          <a:solidFill>
+                            <a:srgbClr val="D97706"/>
+                          </a:solidFill>
+                          <a:latin typeface="Calibri" pitchFamily="34" charset="0"/>
+                          <a:ea typeface="Calibri" pitchFamily="34" charset="-122"/>
+                          <a:cs typeface="Calibri" pitchFamily="34" charset="-120"/>
+                        </a:rPr>
+                        <a:t>21.5%</a:t>
+                      </a:r>
+                      <a:endParaRPr lang="en-US" sz="1100" dirty="0">
+                        <a:latin typeface="Calibri" charset="0"/>
+                        <a:ea typeface="Calibri" charset="0"/>
+                        <a:cs typeface="Calibri" charset="0"/>
+                      </a:endParaRPr>
+                    </a:p>
+                  </a:txBody>
+                  <a:tcPr marL="91440" marR="91440" marT="45720" marB="45720">
+                    <a:lnL w="6350" cap="flat" cmpd="sng" algn="ctr">
+                      <a:solidFill>
+                        <a:srgbClr val="E5E7EB"/>
+                      </a:solidFill>
+                      <a:prstDash val="solid"/>
+                      <a:round/>
+                      <a:headEnd type="none" w="med" len="med"/>
+                      <a:tailEnd type="none" w="med" len="med"/>
+                    </a:lnL>
+                    <a:lnR w="6350" cap="flat" cmpd="sng" algn="ctr">
+                      <a:solidFill>
+                        <a:srgbClr val="E5E7EB"/>
+                      </a:solidFill>
+                      <a:prstDash val="solid"/>
+                      <a:round/>
+                      <a:headEnd type="none" w="med" len="med"/>
+                      <a:tailEnd type="none" w="med" len="med"/>
+                    </a:lnR>
+                    <a:lnT w="6350" cap="flat" cmpd="sng" algn="ctr">
+                      <a:solidFill>
+                        <a:srgbClr val="E5E7EB"/>
+                      </a:solidFill>
+                      <a:prstDash val="solid"/>
+                      <a:round/>
+                      <a:headEnd type="none" w="med" len="med"/>
+                      <a:tailEnd type="none" w="med" len="med"/>
+                    </a:lnT>
+                    <a:lnB w="6350" cap="flat" cmpd="sng" algn="ctr">
+                      <a:solidFill>
+                        <a:srgbClr val="E5E7EB"/>
+                      </a:solidFill>
+                      <a:prstDash val="solid"/>
+                      <a:round/>
+                      <a:headEnd type="none" w="med" len="med"/>
+                      <a:tailEnd type="none" w="med" len="med"/>
+                    </a:lnB>
+                    <a:solidFill>
+                      <a:srgbClr val="F0FDF4"/>
+                    </a:solidFill>
+                  </a:tcPr>
+                </a:tc>
+              </a:tr>
+              <a:tr h="393192">
+                <a:tc>
+                  <a:txBody>
+                    <a:bodyPr/>
+                    <a:lstStyle/>
+                    <a:p>
+                      <a:pPr indent="0" marL="0">
+                        <a:buNone/>
+                      </a:pPr>
+                      <a:r>
+                        <a:rPr lang="en-US" sz="1000" dirty="0">
+                          <a:solidFill>
+                            <a:srgbClr val="000000"/>
+                          </a:solidFill>
+                          <a:latin typeface="Calibri" pitchFamily="34" charset="0"/>
+                          <a:ea typeface="Calibri" pitchFamily="34" charset="-122"/>
+                          <a:cs typeface="Calibri" pitchFamily="34" charset="-120"/>
+                        </a:rPr>
+                        <a:t>Vinilos Textiles</a:t>
+                      </a:r>
+                      <a:endParaRPr lang="en-US" sz="1000" dirty="0">
+                        <a:latin typeface="Calibri" charset="0"/>
+                        <a:ea typeface="Calibri" charset="0"/>
+                        <a:cs typeface="Calibri" charset="0"/>
+                      </a:endParaRPr>
+                    </a:p>
+                  </a:txBody>
+                  <a:tcPr marL="91440" marR="91440" marT="45720" marB="45720">
+                    <a:lnL w="6350" cap="flat" cmpd="sng" algn="ctr">
+                      <a:solidFill>
+                        <a:srgbClr val="E5E7EB"/>
+                      </a:solidFill>
+                      <a:prstDash val="solid"/>
+                      <a:round/>
+                      <a:headEnd type="none" w="med" len="med"/>
+                      <a:tailEnd type="none" w="med" len="med"/>
+                    </a:lnL>
+                    <a:lnR w="6350" cap="flat" cmpd="sng" algn="ctr">
+                      <a:solidFill>
+                        <a:srgbClr val="E5E7EB"/>
+                      </a:solidFill>
+                      <a:prstDash val="solid"/>
+                      <a:round/>
+                      <a:headEnd type="none" w="med" len="med"/>
+                      <a:tailEnd type="none" w="med" len="med"/>
+                    </a:lnR>
+                    <a:lnT w="6350" cap="flat" cmpd="sng" algn="ctr">
+                      <a:solidFill>
+                        <a:srgbClr val="E5E7EB"/>
+                      </a:solidFill>
+                      <a:prstDash val="solid"/>
+                      <a:round/>
+                      <a:headEnd type="none" w="med" len="med"/>
+                      <a:tailEnd type="none" w="med" len="med"/>
+                    </a:lnT>
+                    <a:lnB w="6350" cap="flat" cmpd="sng" algn="ctr">
+                      <a:solidFill>
+                        <a:srgbClr val="E5E7EB"/>
+                      </a:solidFill>
+                      <a:prstDash val="solid"/>
+                      <a:round/>
+                      <a:headEnd type="none" w="med" len="med"/>
+                      <a:tailEnd type="none" w="med" len="med"/>
+                    </a:lnB>
+                    <a:solidFill>
+                      <a:srgbClr val="FFFFFF"/>
+                    </a:solidFill>
+                  </a:tcPr>
+                </a:tc>
+                <a:tc>
+                  <a:txBody>
+                    <a:bodyPr/>
+                    <a:lstStyle/>
+                    <a:p>
+                      <a:pPr algn="ctr" indent="0" marL="0">
+                        <a:buNone/>
+                      </a:pPr>
+                      <a:r>
+                        <a:rPr lang="en-US" sz="1000" b="1" dirty="0">
+                          <a:solidFill>
+                            <a:srgbClr val="22A45D"/>
+                          </a:solidFill>
+                          <a:latin typeface="Calibri" pitchFamily="34" charset="0"/>
+                          <a:ea typeface="Calibri" pitchFamily="34" charset="-122"/>
+                          <a:cs typeface="Calibri" pitchFamily="34" charset="-120"/>
+                        </a:rPr>
+                        <a:t>$14.115</a:t>
+                      </a:r>
+                      <a:endParaRPr lang="en-US" sz="1000" dirty="0">
+                        <a:latin typeface="Calibri" charset="0"/>
+                        <a:ea typeface="Calibri" charset="0"/>
+                        <a:cs typeface="Calibri" charset="0"/>
+                      </a:endParaRPr>
+                    </a:p>
+                  </a:txBody>
+                  <a:tcPr marL="91440" marR="91440" marT="45720" marB="45720">
+                    <a:lnL w="6350" cap="flat" cmpd="sng" algn="ctr">
+                      <a:solidFill>
+                        <a:srgbClr val="E5E7EB"/>
+                      </a:solidFill>
+                      <a:prstDash val="solid"/>
+                      <a:round/>
+                      <a:headEnd type="none" w="med" len="med"/>
+                      <a:tailEnd type="none" w="med" len="med"/>
+                    </a:lnL>
+                    <a:lnR w="6350" cap="flat" cmpd="sng" algn="ctr">
+                      <a:solidFill>
+                        <a:srgbClr val="E5E7EB"/>
+                      </a:solidFill>
+                      <a:prstDash val="solid"/>
+                      <a:round/>
+                      <a:headEnd type="none" w="med" len="med"/>
+                      <a:tailEnd type="none" w="med" len="med"/>
+                    </a:lnR>
+                    <a:lnT w="6350" cap="flat" cmpd="sng" algn="ctr">
+                      <a:solidFill>
+                        <a:srgbClr val="E5E7EB"/>
+                      </a:solidFill>
+                      <a:prstDash val="solid"/>
+                      <a:round/>
+                      <a:headEnd type="none" w="med" len="med"/>
+                      <a:tailEnd type="none" w="med" len="med"/>
+                    </a:lnT>
+                    <a:lnB w="6350" cap="flat" cmpd="sng" algn="ctr">
+                      <a:solidFill>
+                        <a:srgbClr val="E5E7EB"/>
+                      </a:solidFill>
+                      <a:prstDash val="solid"/>
+                      <a:round/>
+                      <a:headEnd type="none" w="med" len="med"/>
+                      <a:tailEnd type="none" w="med" len="med"/>
+                    </a:lnB>
+                    <a:solidFill>
+                      <a:srgbClr val="FFFFFF"/>
+                    </a:solidFill>
+                  </a:tcPr>
+                </a:tc>
+                <a:tc>
+                  <a:txBody>
+                    <a:bodyPr/>
+                    <a:lstStyle/>
+                    <a:p>
+                      <a:pPr algn="ctr" indent="0" marL="0">
+                        <a:buNone/>
+                      </a:pPr>
+                      <a:r>
+                        <a:rPr lang="en-US" sz="1100" b="1" dirty="0">
+                          <a:solidFill>
+                            <a:srgbClr val="D97706"/>
+                          </a:solidFill>
+                          <a:latin typeface="Calibri" pitchFamily="34" charset="0"/>
+                          <a:ea typeface="Calibri" pitchFamily="34" charset="-122"/>
+                          <a:cs typeface="Calibri" pitchFamily="34" charset="-120"/>
+                        </a:rPr>
+                        <a:t>19.8%</a:t>
+                      </a:r>
+                      <a:endParaRPr lang="en-US" sz="1100" dirty="0">
+                        <a:latin typeface="Calibri" charset="0"/>
+                        <a:ea typeface="Calibri" charset="0"/>
+                        <a:cs typeface="Calibri" charset="0"/>
+                      </a:endParaRPr>
+                    </a:p>
+                  </a:txBody>
+                  <a:tcPr marL="91440" marR="91440" marT="45720" marB="45720">
+                    <a:lnL w="6350" cap="flat" cmpd="sng" algn="ctr">
+                      <a:solidFill>
+                        <a:srgbClr val="E5E7EB"/>
+                      </a:solidFill>
+                      <a:prstDash val="solid"/>
+                      <a:round/>
+                      <a:headEnd type="none" w="med" len="med"/>
+                      <a:tailEnd type="none" w="med" len="med"/>
+                    </a:lnL>
+                    <a:lnR w="6350" cap="flat" cmpd="sng" algn="ctr">
+                      <a:solidFill>
+                        <a:srgbClr val="E5E7EB"/>
+                      </a:solidFill>
+                      <a:prstDash val="solid"/>
+                      <a:round/>
+                      <a:headEnd type="none" w="med" len="med"/>
+                      <a:tailEnd type="none" w="med" len="med"/>
+                    </a:lnR>
+                    <a:lnT w="6350" cap="flat" cmpd="sng" algn="ctr">
+                      <a:solidFill>
+                        <a:srgbClr val="E5E7EB"/>
+                      </a:solidFill>
+                      <a:prstDash val="solid"/>
+                      <a:round/>
+                      <a:headEnd type="none" w="med" len="med"/>
+                      <a:tailEnd type="none" w="med" len="med"/>
+                    </a:lnT>
+                    <a:lnB w="6350" cap="flat" cmpd="sng" algn="ctr">
+                      <a:solidFill>
+                        <a:srgbClr val="E5E7EB"/>
+                      </a:solidFill>
+                      <a:prstDash val="solid"/>
+                      <a:round/>
+                      <a:headEnd type="none" w="med" len="med"/>
+                      <a:tailEnd type="none" w="med" len="med"/>
+                    </a:lnB>
+                    <a:solidFill>
+                      <a:srgbClr val="FFFFFF"/>
+                    </a:solidFill>
+                  </a:tcPr>
+                </a:tc>
+              </a:tr>
+              <a:tr h="393192">
+                <a:tc>
+                  <a:txBody>
+                    <a:bodyPr/>
+                    <a:lstStyle/>
+                    <a:p>
+                      <a:pPr indent="0" marL="0">
+                        <a:buNone/>
+                      </a:pPr>
+                      <a:r>
+                        <a:rPr lang="en-US" sz="1000" dirty="0">
+                          <a:solidFill>
+                            <a:srgbClr val="000000"/>
+                          </a:solidFill>
+                          <a:latin typeface="Calibri" pitchFamily="34" charset="0"/>
+                          <a:ea typeface="Calibri" pitchFamily="34" charset="-122"/>
+                          <a:cs typeface="Calibri" pitchFamily="34" charset="-120"/>
+                        </a:rPr>
+                        <a:t>Vinilos de Corte</a:t>
+                      </a:r>
+                      <a:endParaRPr lang="en-US" sz="1000" dirty="0">
+                        <a:latin typeface="Calibri" charset="0"/>
+                        <a:ea typeface="Calibri" charset="0"/>
+                        <a:cs typeface="Calibri" charset="0"/>
+                      </a:endParaRPr>
+                    </a:p>
+                  </a:txBody>
+                  <a:tcPr marL="91440" marR="91440" marT="45720" marB="45720">
+                    <a:lnL w="6350" cap="flat" cmpd="sng" algn="ctr">
+                      <a:solidFill>
+                        <a:srgbClr val="E5E7EB"/>
+                      </a:solidFill>
+                      <a:prstDash val="solid"/>
+                      <a:round/>
+                      <a:headEnd type="none" w="med" len="med"/>
+                      <a:tailEnd type="none" w="med" len="med"/>
+                    </a:lnL>
+                    <a:lnR w="6350" cap="flat" cmpd="sng" algn="ctr">
+                      <a:solidFill>
+                        <a:srgbClr val="E5E7EB"/>
+                      </a:solidFill>
+                      <a:prstDash val="solid"/>
+                      <a:round/>
+                      <a:headEnd type="none" w="med" len="med"/>
+                      <a:tailEnd type="none" w="med" len="med"/>
+                    </a:lnR>
+                    <a:lnT w="6350" cap="flat" cmpd="sng" algn="ctr">
+                      <a:solidFill>
+                        <a:srgbClr val="E5E7EB"/>
+                      </a:solidFill>
+                      <a:prstDash val="solid"/>
+                      <a:round/>
+                      <a:headEnd type="none" w="med" len="med"/>
+                      <a:tailEnd type="none" w="med" len="med"/>
+                    </a:lnT>
+                    <a:lnB w="6350" cap="flat" cmpd="sng" algn="ctr">
+                      <a:solidFill>
+                        <a:srgbClr val="E5E7EB"/>
+                      </a:solidFill>
+                      <a:prstDash val="solid"/>
+                      <a:round/>
+                      <a:headEnd type="none" w="med" len="med"/>
+                      <a:tailEnd type="none" w="med" len="med"/>
+                    </a:lnB>
+                    <a:solidFill>
+                      <a:srgbClr val="F0FDF4"/>
+                    </a:solidFill>
+                  </a:tcPr>
+                </a:tc>
+                <a:tc>
+                  <a:txBody>
+                    <a:bodyPr/>
+                    <a:lstStyle/>
+                    <a:p>
+                      <a:pPr algn="ctr" indent="0" marL="0">
+                        <a:buNone/>
+                      </a:pPr>
+                      <a:r>
+                        <a:rPr lang="en-US" sz="1000" b="1" dirty="0">
+                          <a:solidFill>
+                            <a:srgbClr val="22A45D"/>
+                          </a:solidFill>
+                          <a:latin typeface="Calibri" pitchFamily="34" charset="0"/>
+                          <a:ea typeface="Calibri" pitchFamily="34" charset="-122"/>
+                          <a:cs typeface="Calibri" pitchFamily="34" charset="-120"/>
+                        </a:rPr>
+                        <a:t>$8.531</a:t>
+                      </a:r>
+                      <a:endParaRPr lang="en-US" sz="1000" dirty="0">
+                        <a:latin typeface="Calibri" charset="0"/>
+                        <a:ea typeface="Calibri" charset="0"/>
+                        <a:cs typeface="Calibri" charset="0"/>
+                      </a:endParaRPr>
+                    </a:p>
+                  </a:txBody>
+                  <a:tcPr marL="91440" marR="91440" marT="45720" marB="45720">
+                    <a:lnL w="6350" cap="flat" cmpd="sng" algn="ctr">
+                      <a:solidFill>
+                        <a:srgbClr val="E5E7EB"/>
+                      </a:solidFill>
+                      <a:prstDash val="solid"/>
+                      <a:round/>
+                      <a:headEnd type="none" w="med" len="med"/>
+                      <a:tailEnd type="none" w="med" len="med"/>
+                    </a:lnL>
+                    <a:lnR w="6350" cap="flat" cmpd="sng" algn="ctr">
+                      <a:solidFill>
+                        <a:srgbClr val="E5E7EB"/>
+                      </a:solidFill>
+                      <a:prstDash val="solid"/>
+                      <a:round/>
+                      <a:headEnd type="none" w="med" len="med"/>
+                      <a:tailEnd type="none" w="med" len="med"/>
+                    </a:lnR>
+                    <a:lnT w="6350" cap="flat" cmpd="sng" algn="ctr">
+                      <a:solidFill>
+                        <a:srgbClr val="E5E7EB"/>
+                      </a:solidFill>
+                      <a:prstDash val="solid"/>
+                      <a:round/>
+                      <a:headEnd type="none" w="med" len="med"/>
+                      <a:tailEnd type="none" w="med" len="med"/>
+                    </a:lnT>
+                    <a:lnB w="6350" cap="flat" cmpd="sng" algn="ctr">
+                      <a:solidFill>
+                        <a:srgbClr val="E5E7EB"/>
+                      </a:solidFill>
+                      <a:prstDash val="solid"/>
+                      <a:round/>
+                      <a:headEnd type="none" w="med" len="med"/>
+                      <a:tailEnd type="none" w="med" len="med"/>
+                    </a:lnB>
+                    <a:solidFill>
+                      <a:srgbClr val="F0FDF4"/>
+                    </a:solidFill>
+                  </a:tcPr>
+                </a:tc>
+                <a:tc>
+                  <a:txBody>
+                    <a:bodyPr/>
+                    <a:lstStyle/>
+                    <a:p>
+                      <a:pPr algn="ctr" indent="0" marL="0">
+                        <a:buNone/>
+                      </a:pPr>
+                      <a:r>
+                        <a:rPr lang="en-US" sz="1100" b="1" dirty="0">
+                          <a:solidFill>
+                            <a:srgbClr val="4B5563"/>
+                          </a:solidFill>
+                          <a:latin typeface="Calibri" pitchFamily="34" charset="0"/>
+                          <a:ea typeface="Calibri" pitchFamily="34" charset="-122"/>
+                          <a:cs typeface="Calibri" pitchFamily="34" charset="-120"/>
+                        </a:rPr>
+                        <a:t>11.2%</a:t>
+                      </a:r>
+                      <a:endParaRPr lang="en-US" sz="1100" dirty="0">
+                        <a:latin typeface="Calibri" charset="0"/>
+                        <a:ea typeface="Calibri" charset="0"/>
+                        <a:cs typeface="Calibri" charset="0"/>
+                      </a:endParaRPr>
+                    </a:p>
+                  </a:txBody>
+                  <a:tcPr marL="91440" marR="91440" marT="45720" marB="45720">
+                    <a:lnL w="6350" cap="flat" cmpd="sng" algn="ctr">
+                      <a:solidFill>
+                        <a:srgbClr val="E5E7EB"/>
+                      </a:solidFill>
+                      <a:prstDash val="solid"/>
+                      <a:round/>
+                      <a:headEnd type="none" w="med" len="med"/>
+                      <a:tailEnd type="none" w="med" len="med"/>
+                    </a:lnL>
+                    <a:lnR w="6350" cap="flat" cmpd="sng" algn="ctr">
+                      <a:solidFill>
+                        <a:srgbClr val="E5E7EB"/>
+                      </a:solidFill>
+                      <a:prstDash val="solid"/>
+                      <a:round/>
+                      <a:headEnd type="none" w="med" len="med"/>
+                      <a:tailEnd type="none" w="med" len="med"/>
+                    </a:lnR>
+                    <a:lnT w="6350" cap="flat" cmpd="sng" algn="ctr">
+                      <a:solidFill>
+                        <a:srgbClr val="E5E7EB"/>
+                      </a:solidFill>
+                      <a:prstDash val="solid"/>
+                      <a:round/>
+                      <a:headEnd type="none" w="med" len="med"/>
+                      <a:tailEnd type="none" w="med" len="med"/>
+                    </a:lnT>
+                    <a:lnB w="6350" cap="flat" cmpd="sng" algn="ctr">
+                      <a:solidFill>
+                        <a:srgbClr val="E5E7EB"/>
+                      </a:solidFill>
+                      <a:prstDash val="solid"/>
+                      <a:round/>
+                      <a:headEnd type="none" w="med" len="med"/>
+                      <a:tailEnd type="none" w="med" len="med"/>
+                    </a:lnB>
+                    <a:solidFill>
+                      <a:srgbClr val="F0FDF4"/>
+                    </a:solidFill>
+                  </a:tcPr>
+                </a:tc>
+              </a:tr>
+              <a:tr h="393192">
+                <a:tc>
+                  <a:txBody>
+                    <a:bodyPr/>
+                    <a:lstStyle/>
+                    <a:p>
+                      <a:pPr indent="0" marL="0">
+                        <a:buNone/>
+                      </a:pPr>
+                      <a:r>
+                        <a:rPr lang="en-US" sz="1000" dirty="0">
+                          <a:solidFill>
+                            <a:srgbClr val="000000"/>
+                          </a:solidFill>
+                          <a:latin typeface="Calibri" pitchFamily="34" charset="0"/>
+                          <a:ea typeface="Calibri" pitchFamily="34" charset="-122"/>
+                          <a:cs typeface="Calibri" pitchFamily="34" charset="-120"/>
+                        </a:rPr>
+                        <a:t>Sublimación</a:t>
+                      </a:r>
+                      <a:endParaRPr lang="en-US" sz="1000" dirty="0">
+                        <a:latin typeface="Calibri" charset="0"/>
+                        <a:ea typeface="Calibri" charset="0"/>
+                        <a:cs typeface="Calibri" charset="0"/>
+                      </a:endParaRPr>
+                    </a:p>
+                  </a:txBody>
+                  <a:tcPr marL="91440" marR="91440" marT="45720" marB="45720">
+                    <a:lnL w="6350" cap="flat" cmpd="sng" algn="ctr">
+                      <a:solidFill>
+                        <a:srgbClr val="E5E7EB"/>
+                      </a:solidFill>
+                      <a:prstDash val="solid"/>
+                      <a:round/>
+                      <a:headEnd type="none" w="med" len="med"/>
+                      <a:tailEnd type="none" w="med" len="med"/>
+                    </a:lnL>
+                    <a:lnR w="6350" cap="flat" cmpd="sng" algn="ctr">
+                      <a:solidFill>
+                        <a:srgbClr val="E5E7EB"/>
+                      </a:solidFill>
+                      <a:prstDash val="solid"/>
+                      <a:round/>
+                      <a:headEnd type="none" w="med" len="med"/>
+                      <a:tailEnd type="none" w="med" len="med"/>
+                    </a:lnR>
+                    <a:lnT w="6350" cap="flat" cmpd="sng" algn="ctr">
+                      <a:solidFill>
+                        <a:srgbClr val="E5E7EB"/>
+                      </a:solidFill>
+                      <a:prstDash val="solid"/>
+                      <a:round/>
+                      <a:headEnd type="none" w="med" len="med"/>
+                      <a:tailEnd type="none" w="med" len="med"/>
+                    </a:lnT>
+                    <a:lnB w="6350" cap="flat" cmpd="sng" algn="ctr">
+                      <a:solidFill>
+                        <a:srgbClr val="E5E7EB"/>
+                      </a:solidFill>
+                      <a:prstDash val="solid"/>
+                      <a:round/>
+                      <a:headEnd type="none" w="med" len="med"/>
+                      <a:tailEnd type="none" w="med" len="med"/>
+                    </a:lnB>
+                    <a:solidFill>
+                      <a:srgbClr val="FFFFFF"/>
+                    </a:solidFill>
+                  </a:tcPr>
+                </a:tc>
+                <a:tc>
+                  <a:txBody>
+                    <a:bodyPr/>
+                    <a:lstStyle/>
+                    <a:p>
+                      <a:pPr algn="ctr" indent="0" marL="0">
+                        <a:buNone/>
+                      </a:pPr>
+                      <a:r>
+                        <a:rPr lang="en-US" sz="1000" b="1" dirty="0">
+                          <a:solidFill>
+                            <a:srgbClr val="22A45D"/>
+                          </a:solidFill>
+                          <a:latin typeface="Calibri" pitchFamily="34" charset="0"/>
+                          <a:ea typeface="Calibri" pitchFamily="34" charset="-122"/>
+                          <a:cs typeface="Calibri" pitchFamily="34" charset="-120"/>
+                        </a:rPr>
+                        <a:t>$20.795</a:t>
+                      </a:r>
+                      <a:endParaRPr lang="en-US" sz="1000" dirty="0">
+                        <a:latin typeface="Calibri" charset="0"/>
+                        <a:ea typeface="Calibri" charset="0"/>
+                        <a:cs typeface="Calibri" charset="0"/>
+                      </a:endParaRPr>
+                    </a:p>
+                  </a:txBody>
+                  <a:tcPr marL="91440" marR="91440" marT="45720" marB="45720">
+                    <a:lnL w="6350" cap="flat" cmpd="sng" algn="ctr">
+                      <a:solidFill>
+                        <a:srgbClr val="E5E7EB"/>
+                      </a:solidFill>
+                      <a:prstDash val="solid"/>
+                      <a:round/>
+                      <a:headEnd type="none" w="med" len="med"/>
+                      <a:tailEnd type="none" w="med" len="med"/>
+                    </a:lnL>
+                    <a:lnR w="6350" cap="flat" cmpd="sng" algn="ctr">
+                      <a:solidFill>
+                        <a:srgbClr val="E5E7EB"/>
+                      </a:solidFill>
+                      <a:prstDash val="solid"/>
+                      <a:round/>
+                      <a:headEnd type="none" w="med" len="med"/>
+                      <a:tailEnd type="none" w="med" len="med"/>
+                    </a:lnR>
+                    <a:lnT w="6350" cap="flat" cmpd="sng" algn="ctr">
+                      <a:solidFill>
+                        <a:srgbClr val="E5E7EB"/>
+                      </a:solidFill>
+                      <a:prstDash val="solid"/>
+                      <a:round/>
+                      <a:headEnd type="none" w="med" len="med"/>
+                      <a:tailEnd type="none" w="med" len="med"/>
+                    </a:lnT>
+                    <a:lnB w="6350" cap="flat" cmpd="sng" algn="ctr">
+                      <a:solidFill>
+                        <a:srgbClr val="E5E7EB"/>
+                      </a:solidFill>
+                      <a:prstDash val="solid"/>
+                      <a:round/>
+                      <a:headEnd type="none" w="med" len="med"/>
+                      <a:tailEnd type="none" w="med" len="med"/>
+                    </a:lnB>
+                    <a:solidFill>
+                      <a:srgbClr val="FFFFFF"/>
+                    </a:solidFill>
+                  </a:tcPr>
+                </a:tc>
+                <a:tc>
+                  <a:txBody>
+                    <a:bodyPr/>
+                    <a:lstStyle/>
+                    <a:p>
+                      <a:pPr algn="ctr" indent="0" marL="0">
+                        <a:buNone/>
+                      </a:pPr>
+                      <a:r>
+                        <a:rPr lang="en-US" sz="1100" b="1" dirty="0">
+                          <a:solidFill>
+                            <a:srgbClr val="4B5563"/>
+                          </a:solidFill>
+                          <a:latin typeface="Calibri" pitchFamily="34" charset="0"/>
+                          <a:ea typeface="Calibri" pitchFamily="34" charset="-122"/>
+                          <a:cs typeface="Calibri" pitchFamily="34" charset="-120"/>
+                        </a:rPr>
+                        <a:t>10.5%</a:t>
+                      </a:r>
+                      <a:endParaRPr lang="en-US" sz="1100" dirty="0">
+                        <a:latin typeface="Calibri" charset="0"/>
+                        <a:ea typeface="Calibri" charset="0"/>
+                        <a:cs typeface="Calibri" charset="0"/>
+                      </a:endParaRPr>
+                    </a:p>
+                  </a:txBody>
+                  <a:tcPr marL="91440" marR="91440" marT="45720" marB="45720">
+                    <a:lnL w="6350" cap="flat" cmpd="sng" algn="ctr">
+                      <a:solidFill>
+                        <a:srgbClr val="E5E7EB"/>
+                      </a:solidFill>
+                      <a:prstDash val="solid"/>
+                      <a:round/>
+                      <a:headEnd type="none" w="med" len="med"/>
+                      <a:tailEnd type="none" w="med" len="med"/>
+                    </a:lnL>
+                    <a:lnR w="6350" cap="flat" cmpd="sng" algn="ctr">
+                      <a:solidFill>
+                        <a:srgbClr val="E5E7EB"/>
+                      </a:solidFill>
+                      <a:prstDash val="solid"/>
+                      <a:round/>
+                      <a:headEnd type="none" w="med" len="med"/>
+                      <a:tailEnd type="none" w="med" len="med"/>
+                    </a:lnR>
+                    <a:lnT w="6350" cap="flat" cmpd="sng" algn="ctr">
+                      <a:solidFill>
+                        <a:srgbClr val="E5E7EB"/>
+                      </a:solidFill>
+                      <a:prstDash val="solid"/>
+                      <a:round/>
+                      <a:headEnd type="none" w="med" len="med"/>
+                      <a:tailEnd type="none" w="med" len="med"/>
+                    </a:lnT>
+                    <a:lnB w="6350" cap="flat" cmpd="sng" algn="ctr">
+                      <a:solidFill>
+                        <a:srgbClr val="E5E7EB"/>
+                      </a:solidFill>
+                      <a:prstDash val="solid"/>
+                      <a:round/>
+                      <a:headEnd type="none" w="med" len="med"/>
+                      <a:tailEnd type="none" w="med" len="med"/>
+                    </a:lnB>
+                    <a:solidFill>
+                      <a:srgbClr val="FFFFFF"/>
+                    </a:solidFill>
+                  </a:tcPr>
+                </a:tc>
+              </a:tr>
+              <a:tr h="393192">
+                <a:tc>
+                  <a:txBody>
+                    <a:bodyPr/>
+                    <a:lstStyle/>
+                    <a:p>
+                      <a:pPr indent="0" marL="0">
+                        <a:buNone/>
+                      </a:pPr>
+                      <a:r>
+                        <a:rPr lang="en-US" sz="1000" dirty="0">
+                          <a:solidFill>
+                            <a:srgbClr val="000000"/>
+                          </a:solidFill>
+                          <a:latin typeface="Calibri" pitchFamily="34" charset="0"/>
+                          <a:ea typeface="Calibri" pitchFamily="34" charset="-122"/>
+                          <a:cs typeface="Calibri" pitchFamily="34" charset="-120"/>
+                        </a:rPr>
+                        <a:t>Kraft</a:t>
+                      </a:r>
+                      <a:endParaRPr lang="en-US" sz="1000" dirty="0">
+                        <a:latin typeface="Calibri" charset="0"/>
+                        <a:ea typeface="Calibri" charset="0"/>
+                        <a:cs typeface="Calibri" charset="0"/>
+                      </a:endParaRPr>
+                    </a:p>
+                  </a:txBody>
+                  <a:tcPr marL="91440" marR="91440" marT="45720" marB="45720">
+                    <a:lnL w="6350" cap="flat" cmpd="sng" algn="ctr">
+                      <a:solidFill>
+                        <a:srgbClr val="E5E7EB"/>
+                      </a:solidFill>
+                      <a:prstDash val="solid"/>
+                      <a:round/>
+                      <a:headEnd type="none" w="med" len="med"/>
+                      <a:tailEnd type="none" w="med" len="med"/>
+                    </a:lnL>
+                    <a:lnR w="6350" cap="flat" cmpd="sng" algn="ctr">
+                      <a:solidFill>
+                        <a:srgbClr val="E5E7EB"/>
+                      </a:solidFill>
+                      <a:prstDash val="solid"/>
+                      <a:round/>
+                      <a:headEnd type="none" w="med" len="med"/>
+                      <a:tailEnd type="none" w="med" len="med"/>
+                    </a:lnR>
+                    <a:lnT w="6350" cap="flat" cmpd="sng" algn="ctr">
+                      <a:solidFill>
+                        <a:srgbClr val="E5E7EB"/>
+                      </a:solidFill>
+                      <a:prstDash val="solid"/>
+                      <a:round/>
+                      <a:headEnd type="none" w="med" len="med"/>
+                      <a:tailEnd type="none" w="med" len="med"/>
+                    </a:lnT>
+                    <a:lnB w="6350" cap="flat" cmpd="sng" algn="ctr">
+                      <a:solidFill>
+                        <a:srgbClr val="E5E7EB"/>
+                      </a:solidFill>
+                      <a:prstDash val="solid"/>
+                      <a:round/>
+                      <a:headEnd type="none" w="med" len="med"/>
+                      <a:tailEnd type="none" w="med" len="med"/>
+                    </a:lnB>
+                    <a:solidFill>
+                      <a:srgbClr val="F0FDF4"/>
+                    </a:solidFill>
+                  </a:tcPr>
+                </a:tc>
+                <a:tc>
+                  <a:txBody>
+                    <a:bodyPr/>
+                    <a:lstStyle/>
+                    <a:p>
+                      <a:pPr algn="ctr" indent="0" marL="0">
+                        <a:buNone/>
+                      </a:pPr>
+                      <a:r>
+                        <a:rPr lang="en-US" sz="1000" b="1" dirty="0">
+                          <a:solidFill>
+                            <a:srgbClr val="22A45D"/>
+                          </a:solidFill>
+                          <a:latin typeface="Calibri" pitchFamily="34" charset="0"/>
+                          <a:ea typeface="Calibri" pitchFamily="34" charset="-122"/>
+                          <a:cs typeface="Calibri" pitchFamily="34" charset="-120"/>
+                        </a:rPr>
+                        <a:t>$5.444</a:t>
+                      </a:r>
+                      <a:endParaRPr lang="en-US" sz="1000" dirty="0">
+                        <a:latin typeface="Calibri" charset="0"/>
+                        <a:ea typeface="Calibri" charset="0"/>
+                        <a:cs typeface="Calibri" charset="0"/>
+                      </a:endParaRPr>
+                    </a:p>
+                  </a:txBody>
+                  <a:tcPr marL="91440" marR="91440" marT="45720" marB="45720">
+                    <a:lnL w="6350" cap="flat" cmpd="sng" algn="ctr">
+                      <a:solidFill>
+                        <a:srgbClr val="E5E7EB"/>
+                      </a:solidFill>
+                      <a:prstDash val="solid"/>
+                      <a:round/>
+                      <a:headEnd type="none" w="med" len="med"/>
+                      <a:tailEnd type="none" w="med" len="med"/>
+                    </a:lnL>
+                    <a:lnR w="6350" cap="flat" cmpd="sng" algn="ctr">
+                      <a:solidFill>
+                        <a:srgbClr val="E5E7EB"/>
+                      </a:solidFill>
+                      <a:prstDash val="solid"/>
+                      <a:round/>
+                      <a:headEnd type="none" w="med" len="med"/>
+                      <a:tailEnd type="none" w="med" len="med"/>
+                    </a:lnR>
+                    <a:lnT w="6350" cap="flat" cmpd="sng" algn="ctr">
+                      <a:solidFill>
+                        <a:srgbClr val="E5E7EB"/>
+                      </a:solidFill>
+                      <a:prstDash val="solid"/>
+                      <a:round/>
+                      <a:headEnd type="none" w="med" len="med"/>
+                      <a:tailEnd type="none" w="med" len="med"/>
+                    </a:lnT>
+                    <a:lnB w="6350" cap="flat" cmpd="sng" algn="ctr">
+                      <a:solidFill>
+                        <a:srgbClr val="E5E7EB"/>
+                      </a:solidFill>
+                      <a:prstDash val="solid"/>
+                      <a:round/>
+                      <a:headEnd type="none" w="med" len="med"/>
+                      <a:tailEnd type="none" w="med" len="med"/>
+                    </a:lnB>
+                    <a:solidFill>
+                      <a:srgbClr val="F0FDF4"/>
+                    </a:solidFill>
+                  </a:tcPr>
+                </a:tc>
+                <a:tc>
+                  <a:txBody>
+                    <a:bodyPr/>
+                    <a:lstStyle/>
+                    <a:p>
+                      <a:pPr algn="ctr" indent="0" marL="0">
+                        <a:buNone/>
+                      </a:pPr>
+                      <a:r>
+                        <a:rPr lang="en-US" sz="1100" b="1" dirty="0">
+                          <a:solidFill>
+                            <a:srgbClr val="4B5563"/>
+                          </a:solidFill>
+                          <a:latin typeface="Calibri" pitchFamily="34" charset="0"/>
+                          <a:ea typeface="Calibri" pitchFamily="34" charset="-122"/>
+                          <a:cs typeface="Calibri" pitchFamily="34" charset="-120"/>
+                        </a:rPr>
+                        <a:t>7.1%</a:t>
+                      </a:r>
+                      <a:endParaRPr lang="en-US" sz="1100" dirty="0">
+                        <a:latin typeface="Calibri" charset="0"/>
+                        <a:ea typeface="Calibri" charset="0"/>
+                        <a:cs typeface="Calibri" charset="0"/>
+                      </a:endParaRPr>
+                    </a:p>
+                  </a:txBody>
+                  <a:tcPr marL="91440" marR="91440" marT="45720" marB="45720">
+                    <a:lnL w="6350" cap="flat" cmpd="sng" algn="ctr">
+                      <a:solidFill>
+                        <a:srgbClr val="E5E7EB"/>
+                      </a:solidFill>
+                      <a:prstDash val="solid"/>
+                      <a:round/>
+                      <a:headEnd type="none" w="med" len="med"/>
+                      <a:tailEnd type="none" w="med" len="med"/>
+                    </a:lnL>
+                    <a:lnR w="6350" cap="flat" cmpd="sng" algn="ctr">
+                      <a:solidFill>
+                        <a:srgbClr val="E5E7EB"/>
+                      </a:solidFill>
+                      <a:prstDash val="solid"/>
+                      <a:round/>
+                      <a:headEnd type="none" w="med" len="med"/>
+                      <a:tailEnd type="none" w="med" len="med"/>
+                    </a:lnR>
+                    <a:lnT w="6350" cap="flat" cmpd="sng" algn="ctr">
+                      <a:solidFill>
+                        <a:srgbClr val="E5E7EB"/>
+                      </a:solidFill>
+                      <a:prstDash val="solid"/>
+                      <a:round/>
+                      <a:headEnd type="none" w="med" len="med"/>
+                      <a:tailEnd type="none" w="med" len="med"/>
+                    </a:lnT>
+                    <a:lnB w="6350" cap="flat" cmpd="sng" algn="ctr">
+                      <a:solidFill>
+                        <a:srgbClr val="E5E7EB"/>
+                      </a:solidFill>
+                      <a:prstDash val="solid"/>
+                      <a:round/>
+                      <a:headEnd type="none" w="med" len="med"/>
+                      <a:tailEnd type="none" w="med" len="med"/>
+                    </a:lnB>
+                    <a:solidFill>
+                      <a:srgbClr val="F0FDF4"/>
+                    </a:solidFill>
+                  </a:tcPr>
+                </a:tc>
+              </a:tr>
+              <a:tr h="393192">
+                <a:tc>
+                  <a:txBody>
+                    <a:bodyPr/>
+                    <a:lstStyle/>
+                    <a:p>
+                      <a:pPr indent="0" marL="0">
+                        <a:buNone/>
+                      </a:pPr>
+                      <a:r>
+                        <a:rPr lang="en-US" sz="1100" b="1" dirty="0">
+                          <a:solidFill>
+                            <a:srgbClr val="1B2E5E"/>
+                          </a:solidFill>
+                          <a:latin typeface="Calibri" pitchFamily="34" charset="0"/>
+                          <a:ea typeface="Calibri" pitchFamily="34" charset="-122"/>
+                          <a:cs typeface="Calibri" pitchFamily="34" charset="-120"/>
+                        </a:rPr>
+                        <a:t>TOTAL</a:t>
+                      </a:r>
+                      <a:endParaRPr lang="en-US" sz="1100" dirty="0">
+                        <a:latin typeface="Calibri" charset="0"/>
+                        <a:ea typeface="Calibri" charset="0"/>
+                        <a:cs typeface="Calibri" charset="0"/>
+                      </a:endParaRPr>
+                    </a:p>
+                  </a:txBody>
+                  <a:tcPr marL="91440" marR="91440" marT="45720" marB="45720">
+                    <a:lnL w="6350" cap="flat" cmpd="sng" algn="ctr">
+                      <a:solidFill>
+                        <a:srgbClr val="E5E7EB"/>
+                      </a:solidFill>
+                      <a:prstDash val="solid"/>
+                      <a:round/>
+                      <a:headEnd type="none" w="med" len="med"/>
+                      <a:tailEnd type="none" w="med" len="med"/>
+                    </a:lnL>
+                    <a:lnR w="6350" cap="flat" cmpd="sng" algn="ctr">
+                      <a:solidFill>
+                        <a:srgbClr val="E5E7EB"/>
+                      </a:solidFill>
+                      <a:prstDash val="solid"/>
+                      <a:round/>
+                      <a:headEnd type="none" w="med" len="med"/>
+                      <a:tailEnd type="none" w="med" len="med"/>
+                    </a:lnR>
+                    <a:lnT w="6350" cap="flat" cmpd="sng" algn="ctr">
+                      <a:solidFill>
+                        <a:srgbClr val="E5E7EB"/>
+                      </a:solidFill>
+                      <a:prstDash val="solid"/>
+                      <a:round/>
+                      <a:headEnd type="none" w="med" len="med"/>
+                      <a:tailEnd type="none" w="med" len="med"/>
+                    </a:lnT>
+                    <a:lnB w="6350" cap="flat" cmpd="sng" algn="ctr">
+                      <a:solidFill>
+                        <a:srgbClr val="E5E7EB"/>
+                      </a:solidFill>
+                      <a:prstDash val="solid"/>
+                      <a:round/>
+                      <a:headEnd type="none" w="med" len="med"/>
+                      <a:tailEnd type="none" w="med" len="med"/>
+                    </a:lnB>
+                    <a:solidFill>
+                      <a:srgbClr val="DCFCE7"/>
+                    </a:solidFill>
+                  </a:tcPr>
+                </a:tc>
+                <a:tc>
+                  <a:txBody>
+                    <a:bodyPr/>
+                    <a:lstStyle/>
+                    <a:p>
+                      <a:pPr algn="ctr" indent="0" marL="0">
+                        <a:buNone/>
+                      </a:pPr>
+                      <a:r>
+                        <a:rPr lang="en-US" sz="1100" b="1" dirty="0">
+                          <a:solidFill>
+                            <a:srgbClr val="22A45D"/>
+                          </a:solidFill>
+                          <a:latin typeface="Calibri" pitchFamily="34" charset="0"/>
+                          <a:ea typeface="Calibri" pitchFamily="34" charset="-122"/>
+                          <a:cs typeface="Calibri" pitchFamily="34" charset="-120"/>
+                        </a:rPr>
+                        <a:t>$434.895</a:t>
+                      </a:r>
+                      <a:endParaRPr lang="en-US" sz="1100" dirty="0">
+                        <a:latin typeface="Calibri" charset="0"/>
+                        <a:ea typeface="Calibri" charset="0"/>
+                        <a:cs typeface="Calibri" charset="0"/>
+                      </a:endParaRPr>
+                    </a:p>
+                  </a:txBody>
+                  <a:tcPr marL="91440" marR="91440" marT="45720" marB="45720">
+                    <a:lnL w="6350" cap="flat" cmpd="sng" algn="ctr">
+                      <a:solidFill>
+                        <a:srgbClr val="E5E7EB"/>
+                      </a:solidFill>
+                      <a:prstDash val="solid"/>
+                      <a:round/>
+                      <a:headEnd type="none" w="med" len="med"/>
+                      <a:tailEnd type="none" w="med" len="med"/>
+                    </a:lnL>
+                    <a:lnR w="6350" cap="flat" cmpd="sng" algn="ctr">
+                      <a:solidFill>
+                        <a:srgbClr val="E5E7EB"/>
+                      </a:solidFill>
+                      <a:prstDash val="solid"/>
+                      <a:round/>
+                      <a:headEnd type="none" w="med" len="med"/>
+                      <a:tailEnd type="none" w="med" len="med"/>
+                    </a:lnR>
+                    <a:lnT w="6350" cap="flat" cmpd="sng" algn="ctr">
+                      <a:solidFill>
+                        <a:srgbClr val="E5E7EB"/>
+                      </a:solidFill>
+                      <a:prstDash val="solid"/>
+                      <a:round/>
+                      <a:headEnd type="none" w="med" len="med"/>
+                      <a:tailEnd type="none" w="med" len="med"/>
+                    </a:lnT>
+                    <a:lnB w="6350" cap="flat" cmpd="sng" algn="ctr">
+                      <a:solidFill>
+                        <a:srgbClr val="E5E7EB"/>
+                      </a:solidFill>
+                      <a:prstDash val="solid"/>
+                      <a:round/>
+                      <a:headEnd type="none" w="med" len="med"/>
+                      <a:tailEnd type="none" w="med" len="med"/>
+                    </a:lnB>
+                    <a:solidFill>
+                      <a:srgbClr val="DCFCE7"/>
+                    </a:solidFill>
+                  </a:tcPr>
+                </a:tc>
+                <a:tc>
+                  <a:txBody>
+                    <a:bodyPr/>
+                    <a:lstStyle/>
+                    <a:p>
+                      <a:pPr algn="ctr" indent="0" marL="0">
+                        <a:buNone/>
+                      </a:pPr>
+                      <a:r>
+                        <a:rPr lang="en-US" sz="1100" b="1" dirty="0">
+                          <a:solidFill>
+                            <a:srgbClr val="22A45D"/>
+                          </a:solidFill>
+                          <a:latin typeface="Calibri" pitchFamily="34" charset="0"/>
+                          <a:ea typeface="Calibri" pitchFamily="34" charset="-122"/>
+                          <a:cs typeface="Calibri" pitchFamily="34" charset="-120"/>
+                        </a:rPr>
+                        <a:t>21,0%</a:t>
+                      </a:r>
+                      <a:endParaRPr lang="en-US" sz="1100" dirty="0">
+                        <a:latin typeface="Calibri" charset="0"/>
+                        <a:ea typeface="Calibri" charset="0"/>
+                        <a:cs typeface="Calibri" charset="0"/>
+                      </a:endParaRPr>
+                    </a:p>
+                  </a:txBody>
+                  <a:tcPr marL="91440" marR="91440" marT="45720" marB="45720">
+                    <a:lnL w="6350" cap="flat" cmpd="sng" algn="ctr">
+                      <a:solidFill>
+                        <a:srgbClr val="E5E7EB"/>
+                      </a:solidFill>
+                      <a:prstDash val="solid"/>
+                      <a:round/>
+                      <a:headEnd type="none" w="med" len="med"/>
+                      <a:tailEnd type="none" w="med" len="med"/>
+                    </a:lnL>
+                    <a:lnR w="6350" cap="flat" cmpd="sng" algn="ctr">
+                      <a:solidFill>
+                        <a:srgbClr val="E5E7EB"/>
+                      </a:solidFill>
+                      <a:prstDash val="solid"/>
+                      <a:round/>
+                      <a:headEnd type="none" w="med" len="med"/>
+                      <a:tailEnd type="none" w="med" len="med"/>
+                    </a:lnR>
+                    <a:lnT w="6350" cap="flat" cmpd="sng" algn="ctr">
+                      <a:solidFill>
+                        <a:srgbClr val="E5E7EB"/>
+                      </a:solidFill>
+                      <a:prstDash val="solid"/>
+                      <a:round/>
+                      <a:headEnd type="none" w="med" len="med"/>
+                      <a:tailEnd type="none" w="med" len="med"/>
+                    </a:lnT>
+                    <a:lnB w="6350" cap="flat" cmpd="sng" algn="ctr">
+                      <a:solidFill>
+                        <a:srgbClr val="E5E7EB"/>
+                      </a:solidFill>
+                      <a:prstDash val="solid"/>
+                      <a:round/>
+                      <a:headEnd type="none" w="med" len="med"/>
+                      <a:tailEnd type="none" w="med" len="med"/>
+                    </a:lnB>
+                    <a:solidFill>
+                      <a:srgbClr val="DCFCE7"/>
+                    </a:solidFill>
+                  </a:tcPr>
+                </a:tc>
+              </a:tr>
+            </a:tbl>
+          </a:graphicData>
+        </a:graphic>
+      </p:graphicFrame>
+    </p:spTree>
+  </p:cSld>
+  <p:clrMapOvr>
+    <a:masterClrMapping/>
+  </p:clrMapOvr>
+</p:sld>
+</file>
+
+<file path=ppt/slides/slide7.xml><?xml version="1.0" encoding="utf-8"?>
+<p:sld xmlns:a="http://schemas.openxmlformats.org/drawingml/2006/main" xmlns:r="http://schemas.openxmlformats.org/officeDocument/2006/relationships" xmlns:p="http://schemas.openxmlformats.org/presentationml/2006/main">
+  <p:cSld name="Slide 7">
+    <p:bg>
+      <p:bgPr>
+        <a:solidFill>
+          <a:srgbClr val="F4F6FB"/>
+        </a:solidFill>
+      </p:bgPr>
+    </p:bg>
+    <p:spTree>
+      <p:nvGrpSpPr>
+        <p:cNvPr id="1" name=""/>
+        <p:cNvGrpSpPr/>
+        <p:nvPr/>
+      </p:nvGrpSpPr>
+      <p:grpSpPr>
+        <a:xfrm>
+          <a:off x="0" y="0"/>
+          <a:ext cx="0" cy="0"/>
+          <a:chOff x="0" y="0"/>
+          <a:chExt cx="0" cy="0"/>
+        </a:xfrm>
+      </p:grpSpPr>
+      <p:sp>
+        <p:nvSpPr>
+          <p:cNvPr id="2" name="Text 0"/>
+          <p:cNvSpPr txBox="1"/>
+          <p:nvPr/>
+        </p:nvSpPr>
+        <p:spPr>
+          <a:xfrm>
+            <a:off x="502920" y="228600"/>
+            <a:ext cx="11155680" cy="685800"/>
+          </a:xfrm>
+          <a:prstGeom prst="rect">
+            <a:avLst/>
+          </a:prstGeom>
+          <a:noFill/>
+          <a:ln/>
+        </p:spPr>
+        <p:txBody>
+          <a:bodyPr wrap="square" rtlCol="0" anchor="ctr"/>
+          <a:lstStyle/>
+          <a:p>
+            <a:pPr indent="0" marL="0">
+              <a:buNone/>
+            </a:pPr>
+            <a:r>
+              <a:rPr lang="en-US" sz="3000" b="1" dirty="0">
+                <a:solidFill>
+                  <a:srgbClr val="1B2E5E"/>
+                </a:solidFill>
+                <a:latin typeface="Cambria" pitchFamily="34" charset="0"/>
+                <a:ea typeface="Cambria" pitchFamily="34" charset="-122"/>
+                <a:cs typeface="Cambria" pitchFamily="34" charset="-120"/>
+              </a:rPr>
               <a:t>Top productos a Liquidar</a:t>
             </a:r>
             <a:endParaRPr lang="en-US" sz="3000" dirty="0"/>
@@ -13185,7 +17231,7 @@
       </p:sp>
       <p:graphicFrame>
         <p:nvGraphicFramePr>
-          <p:cNvPr id="7" name="Table 0"/>
+          <p:cNvPr id="8" name="Table 0"/>
           <p:cNvGraphicFramePr>
             <a:graphicFrameLocks noGrp="1"/>
           </p:cNvGraphicFramePr>
@@ -16986,9 +21032,9 @@
 </p:sld>
 </file>
 
-<file path=ppt/slides/slide7.xml><?xml version="1.0" encoding="utf-8"?>
+<file path=ppt/slides/slide8.xml><?xml version="1.0" encoding="utf-8"?>
 <p:sld xmlns:a="http://schemas.openxmlformats.org/drawingml/2006/main" xmlns:r="http://schemas.openxmlformats.org/officeDocument/2006/relationships" xmlns:p="http://schemas.openxmlformats.org/presentationml/2006/main">
-  <p:cSld name="Slide 7">
+  <p:cSld name="Slide 8">
     <p:bg>
       <p:bgPr>
         <a:solidFill>
@@ -17090,7 +21136,7 @@
       </p:sp>
       <p:graphicFrame>
         <p:nvGraphicFramePr>
-          <p:cNvPr id="8" name="Table 0"/>
+          <p:cNvPr id="9" name="Table 0"/>
           <p:cNvGraphicFramePr>
             <a:graphicFrameLocks noGrp="1"/>
           </p:cNvGraphicFramePr>
@@ -21640,9 +25686,9 @@
 </p:sld>
 </file>
 
-<file path=ppt/slides/slide8.xml><?xml version="1.0" encoding="utf-8"?>
+<file path=ppt/slides/slide9.xml><?xml version="1.0" encoding="utf-8"?>
 <p:sld xmlns:a="http://schemas.openxmlformats.org/drawingml/2006/main" xmlns:r="http://schemas.openxmlformats.org/officeDocument/2006/relationships" xmlns:p="http://schemas.openxmlformats.org/presentationml/2006/main">
-  <p:cSld name="Slide 8">
+  <p:cSld name="Slide 9">
     <p:bg>
       <p:bgPr>
         <a:solidFill>
@@ -21787,908 +25833,6 @@
               <a:t>Lo que rota bien y lo que esta por llegar</a:t>
             </a:r>
             <a:endParaRPr lang="en-US" sz="1800" dirty="0"/>
-          </a:p>
-        </p:txBody>
-      </p:sp>
-    </p:spTree>
-  </p:cSld>
-  <p:clrMapOvr>
-    <a:masterClrMapping/>
-  </p:clrMapOvr>
-</p:sld>
-</file>
-
-<file path=ppt/slides/slide9.xml><?xml version="1.0" encoding="utf-8"?>
-<p:sld xmlns:a="http://schemas.openxmlformats.org/drawingml/2006/main" xmlns:r="http://schemas.openxmlformats.org/officeDocument/2006/relationships" xmlns:p="http://schemas.openxmlformats.org/presentationml/2006/main">
-  <p:cSld name="Slide 9">
-    <p:bg>
-      <p:bgPr>
-        <a:solidFill>
-          <a:srgbClr val="F4F6FB"/>
-        </a:solidFill>
-      </p:bgPr>
-    </p:bg>
-    <p:spTree>
-      <p:nvGrpSpPr>
-        <p:cNvPr id="1" name=""/>
-        <p:cNvGrpSpPr/>
-        <p:nvPr/>
-      </p:nvGrpSpPr>
-      <p:grpSpPr>
-        <a:xfrm>
-          <a:off x="0" y="0"/>
-          <a:ext cx="0" cy="0"/>
-          <a:chOff x="0" y="0"/>
-          <a:chExt cx="0" cy="0"/>
-        </a:xfrm>
-      </p:grpSpPr>
-      <p:sp>
-        <p:nvSpPr>
-          <p:cNvPr id="2" name="Text 0"/>
-          <p:cNvSpPr txBox="1"/>
-          <p:nvPr/>
-        </p:nvSpPr>
-        <p:spPr>
-          <a:xfrm>
-            <a:off x="502920" y="228600"/>
-            <a:ext cx="11155680" cy="685800"/>
-          </a:xfrm>
-          <a:prstGeom prst="rect">
-            <a:avLst/>
-          </a:prstGeom>
-          <a:noFill/>
-          <a:ln/>
-        </p:spPr>
-        <p:txBody>
-          <a:bodyPr wrap="square" rtlCol="0" anchor="ctr"/>
-          <a:lstStyle/>
-          <a:p>
-            <a:pPr indent="0" marL="0">
-              <a:buNone/>
-            </a:pPr>
-            <a:r>
-              <a:rPr lang="en-US" sz="3000" b="1" dirty="0">
-                <a:solidFill>
-                  <a:srgbClr val="1B2E5E"/>
-                </a:solidFill>
-                <a:latin typeface="Cambria" pitchFamily="34" charset="0"/>
-                <a:ea typeface="Cambria" pitchFamily="34" charset="-122"/>
-                <a:cs typeface="Cambria" pitchFamily="34" charset="-120"/>
-              </a:rPr>
-              <a:t>Stock saludable — activos y recientes</a:t>
-            </a:r>
-            <a:endParaRPr lang="en-US" sz="3000" dirty="0"/>
-          </a:p>
-        </p:txBody>
-      </p:sp>
-      <p:sp>
-        <p:nvSpPr>
-          <p:cNvPr id="3" name="Shape 1"/>
-          <p:cNvSpPr/>
-          <p:nvPr/>
-        </p:nvSpPr>
-        <p:spPr>
-          <a:xfrm>
-            <a:off x="457200" y="914400"/>
-            <a:ext cx="3474720" cy="1645920"/>
-          </a:xfrm>
-          <a:prstGeom prst="roundRect">
-            <a:avLst>
-              <a:gd name="adj" fmla="val 3889"/>
-            </a:avLst>
-          </a:prstGeom>
-          <a:solidFill>
-            <a:srgbClr val="FFFFFF"/>
-          </a:solidFill>
-          <a:ln w="12700">
-            <a:solidFill>
-              <a:srgbClr val="E5E7EB"/>
-            </a:solidFill>
-            <a:prstDash val="solid"/>
-          </a:ln>
-        </p:spPr>
-      </p:sp>
-      <p:sp>
-        <p:nvSpPr>
-          <p:cNvPr id="4" name="Shape 2"/>
-          <p:cNvSpPr/>
-          <p:nvPr/>
-        </p:nvSpPr>
-        <p:spPr>
-          <a:xfrm>
-            <a:off x="457200" y="914400"/>
-            <a:ext cx="64008" cy="1645920"/>
-          </a:xfrm>
-          <a:prstGeom prst="rect">
-            <a:avLst/>
-          </a:prstGeom>
-          <a:solidFill>
-            <a:srgbClr val="22A45D"/>
-          </a:solidFill>
-          <a:ln w="12700">
-            <a:solidFill>
-              <a:srgbClr val="22A45D"/>
-            </a:solidFill>
-            <a:prstDash val="solid"/>
-          </a:ln>
-        </p:spPr>
-      </p:sp>
-      <p:sp>
-        <p:nvSpPr>
-          <p:cNvPr id="5" name="Text 3"/>
-          <p:cNvSpPr txBox="1"/>
-          <p:nvPr/>
-        </p:nvSpPr>
-        <p:spPr>
-          <a:xfrm>
-            <a:off x="621792" y="1024128"/>
-            <a:ext cx="3218688" cy="855878"/>
-          </a:xfrm>
-          <a:prstGeom prst="rect">
-            <a:avLst/>
-          </a:prstGeom>
-          <a:noFill/>
-          <a:ln/>
-        </p:spPr>
-        <p:txBody>
-          <a:bodyPr wrap="square" rtlCol="0" anchor="ctr"/>
-          <a:lstStyle/>
-          <a:p>
-            <a:pPr algn="ctr" indent="0" marL="0">
-              <a:buNone/>
-            </a:pPr>
-            <a:r>
-              <a:rPr lang="en-US" sz="2600" b="1" dirty="0">
-                <a:solidFill>
-                  <a:srgbClr val="1B2E5E"/>
-                </a:solidFill>
-                <a:latin typeface="Cambria" pitchFamily="34" charset="0"/>
-                <a:ea typeface="Cambria" pitchFamily="34" charset="-122"/>
-                <a:cs typeface="Cambria" pitchFamily="34" charset="-120"/>
-              </a:rPr>
-              <a:t>$54K</a:t>
-            </a:r>
-            <a:endParaRPr lang="en-US" sz="2600" dirty="0"/>
-          </a:p>
-        </p:txBody>
-      </p:sp>
-      <p:sp>
-        <p:nvSpPr>
-          <p:cNvPr id="6" name="Text 4"/>
-          <p:cNvSpPr txBox="1"/>
-          <p:nvPr/>
-        </p:nvSpPr>
-        <p:spPr>
-          <a:xfrm>
-            <a:off x="566928" y="1869034"/>
-            <a:ext cx="3273552" cy="691286"/>
-          </a:xfrm>
-          <a:prstGeom prst="rect">
-            <a:avLst/>
-          </a:prstGeom>
-          <a:noFill/>
-          <a:ln/>
-        </p:spPr>
-        <p:txBody>
-          <a:bodyPr wrap="square" rtlCol="0" anchor="ctr"/>
-          <a:lstStyle/>
-          <a:p>
-            <a:pPr algn="ctr" indent="0" marL="0">
-              <a:buNone/>
-            </a:pPr>
-            <a:r>
-              <a:rPr lang="en-US" sz="1000" dirty="0">
-                <a:solidFill>
-                  <a:srgbClr val="4B5563"/>
-                </a:solidFill>
-                <a:latin typeface="Calibri" pitchFamily="34" charset="0"/>
-                <a:ea typeface="Calibri" pitchFamily="34" charset="-122"/>
-                <a:cs typeface="Calibri" pitchFamily="34" charset="-120"/>
-              </a:rPr>
-              <a:t>Comprar · 67 SKUs</a:t>
-            </a:r>
-            <a:endParaRPr lang="en-US" sz="1000" dirty="0"/>
-          </a:p>
-          <a:p>
-            <a:pPr algn="ctr" indent="0" marL="0">
-              <a:buNone/>
-            </a:pPr>
-            <a:r>
-              <a:rPr lang="en-US" sz="1000" dirty="0">
-                <a:solidFill>
-                  <a:srgbClr val="4B5563"/>
-                </a:solidFill>
-                <a:latin typeface="Calibri" pitchFamily="34" charset="0"/>
-                <a:ea typeface="Calibri" pitchFamily="34" charset="-122"/>
-                <a:cs typeface="Calibri" pitchFamily="34" charset="-120"/>
-              </a:rPr>
-              <a:t>Margen prom. 46.5%</a:t>
-            </a:r>
-            <a:endParaRPr lang="en-US" sz="1000" dirty="0"/>
-          </a:p>
-        </p:txBody>
-      </p:sp>
-      <p:sp>
-        <p:nvSpPr>
-          <p:cNvPr id="7" name="Shape 5"/>
-          <p:cNvSpPr/>
-          <p:nvPr/>
-        </p:nvSpPr>
-        <p:spPr>
-          <a:xfrm>
-            <a:off x="4206240" y="914400"/>
-            <a:ext cx="3474720" cy="1645920"/>
-          </a:xfrm>
-          <a:prstGeom prst="roundRect">
-            <a:avLst>
-              <a:gd name="adj" fmla="val 3889"/>
-            </a:avLst>
-          </a:prstGeom>
-          <a:solidFill>
-            <a:srgbClr val="FFFFFF"/>
-          </a:solidFill>
-          <a:ln w="12700">
-            <a:solidFill>
-              <a:srgbClr val="E5E7EB"/>
-            </a:solidFill>
-            <a:prstDash val="solid"/>
-          </a:ln>
-        </p:spPr>
-      </p:sp>
-      <p:sp>
-        <p:nvSpPr>
-          <p:cNvPr id="8" name="Shape 6"/>
-          <p:cNvSpPr/>
-          <p:nvPr/>
-        </p:nvSpPr>
-        <p:spPr>
-          <a:xfrm>
-            <a:off x="4206240" y="914400"/>
-            <a:ext cx="64008" cy="1645920"/>
-          </a:xfrm>
-          <a:prstGeom prst="rect">
-            <a:avLst/>
-          </a:prstGeom>
-          <a:solidFill>
-            <a:srgbClr val="3B7DD8"/>
-          </a:solidFill>
-          <a:ln w="12700">
-            <a:solidFill>
-              <a:srgbClr val="3B7DD8"/>
-            </a:solidFill>
-            <a:prstDash val="solid"/>
-          </a:ln>
-        </p:spPr>
-      </p:sp>
-      <p:sp>
-        <p:nvSpPr>
-          <p:cNvPr id="9" name="Text 7"/>
-          <p:cNvSpPr txBox="1"/>
-          <p:nvPr/>
-        </p:nvSpPr>
-        <p:spPr>
-          <a:xfrm>
-            <a:off x="4370832" y="1024128"/>
-            <a:ext cx="3218688" cy="855878"/>
-          </a:xfrm>
-          <a:prstGeom prst="rect">
-            <a:avLst/>
-          </a:prstGeom>
-          <a:noFill/>
-          <a:ln/>
-        </p:spPr>
-        <p:txBody>
-          <a:bodyPr wrap="square" rtlCol="0" anchor="ctr"/>
-          <a:lstStyle/>
-          <a:p>
-            <a:pPr algn="ctr" indent="0" marL="0">
-              <a:buNone/>
-            </a:pPr>
-            <a:r>
-              <a:rPr lang="en-US" sz="2600" b="1" dirty="0">
-                <a:solidFill>
-                  <a:srgbClr val="1B2E5E"/>
-                </a:solidFill>
-                <a:latin typeface="Cambria" pitchFamily="34" charset="0"/>
-                <a:ea typeface="Cambria" pitchFamily="34" charset="-122"/>
-                <a:cs typeface="Cambria" pitchFamily="34" charset="-120"/>
-              </a:rPr>
-              <a:t>$339K</a:t>
-            </a:r>
-            <a:endParaRPr lang="en-US" sz="2600" dirty="0"/>
-          </a:p>
-        </p:txBody>
-      </p:sp>
-      <p:sp>
-        <p:nvSpPr>
-          <p:cNvPr id="10" name="Text 8"/>
-          <p:cNvSpPr txBox="1"/>
-          <p:nvPr/>
-        </p:nvSpPr>
-        <p:spPr>
-          <a:xfrm>
-            <a:off x="4315968" y="1869034"/>
-            <a:ext cx="3273552" cy="691286"/>
-          </a:xfrm>
-          <a:prstGeom prst="rect">
-            <a:avLst/>
-          </a:prstGeom>
-          <a:noFill/>
-          <a:ln/>
-        </p:spPr>
-        <p:txBody>
-          <a:bodyPr wrap="square" rtlCol="0" anchor="ctr"/>
-          <a:lstStyle/>
-          <a:p>
-            <a:pPr algn="ctr" indent="0" marL="0">
-              <a:buNone/>
-            </a:pPr>
-            <a:r>
-              <a:rPr lang="en-US" sz="1000" dirty="0">
-                <a:solidFill>
-                  <a:srgbClr val="4B5563"/>
-                </a:solidFill>
-                <a:latin typeface="Calibri" pitchFamily="34" charset="0"/>
-                <a:ea typeface="Calibri" pitchFamily="34" charset="-122"/>
-                <a:cs typeface="Calibri" pitchFamily="34" charset="-120"/>
-              </a:rPr>
-              <a:t>Recien ingresado · 26 SKUs</a:t>
-            </a:r>
-            <a:endParaRPr lang="en-US" sz="1000" dirty="0"/>
-          </a:p>
-          <a:p>
-            <a:pPr algn="ctr" indent="0" marL="0">
-              <a:buNone/>
-            </a:pPr>
-            <a:r>
-              <a:rPr lang="en-US" sz="1000" dirty="0">
-                <a:solidFill>
-                  <a:srgbClr val="4B5563"/>
-                </a:solidFill>
-                <a:latin typeface="Calibri" pitchFamily="34" charset="0"/>
-                <a:ea typeface="Calibri" pitchFamily="34" charset="-122"/>
-                <a:cs typeface="Calibri" pitchFamily="34" charset="-120"/>
-              </a:rPr>
-              <a:t>Margen prom. 46.3%</a:t>
-            </a:r>
-            <a:endParaRPr lang="en-US" sz="1000" dirty="0"/>
-          </a:p>
-        </p:txBody>
-      </p:sp>
-      <p:sp>
-        <p:nvSpPr>
-          <p:cNvPr id="11" name="Shape 9"/>
-          <p:cNvSpPr/>
-          <p:nvPr/>
-        </p:nvSpPr>
-        <p:spPr>
-          <a:xfrm>
-            <a:off x="7955280" y="914400"/>
-            <a:ext cx="3749040" cy="1645920"/>
-          </a:xfrm>
-          <a:prstGeom prst="roundRect">
-            <a:avLst>
-              <a:gd name="adj" fmla="val 3889"/>
-            </a:avLst>
-          </a:prstGeom>
-          <a:solidFill>
-            <a:srgbClr val="FFFFFF"/>
-          </a:solidFill>
-          <a:ln w="12700">
-            <a:solidFill>
-              <a:srgbClr val="E5E7EB"/>
-            </a:solidFill>
-            <a:prstDash val="solid"/>
-          </a:ln>
-        </p:spPr>
-      </p:sp>
-      <p:sp>
-        <p:nvSpPr>
-          <p:cNvPr id="12" name="Shape 10"/>
-          <p:cNvSpPr/>
-          <p:nvPr/>
-        </p:nvSpPr>
-        <p:spPr>
-          <a:xfrm>
-            <a:off x="7955280" y="914400"/>
-            <a:ext cx="64008" cy="1645920"/>
-          </a:xfrm>
-          <a:prstGeom prst="rect">
-            <a:avLst/>
-          </a:prstGeom>
-          <a:solidFill>
-            <a:srgbClr val="7C3AED"/>
-          </a:solidFill>
-          <a:ln w="12700">
-            <a:solidFill>
-              <a:srgbClr val="7C3AED"/>
-            </a:solidFill>
-            <a:prstDash val="solid"/>
-          </a:ln>
-        </p:spPr>
-      </p:sp>
-      <p:sp>
-        <p:nvSpPr>
-          <p:cNvPr id="13" name="Text 11"/>
-          <p:cNvSpPr txBox="1"/>
-          <p:nvPr/>
-        </p:nvSpPr>
-        <p:spPr>
-          <a:xfrm>
-            <a:off x="8119872" y="1024128"/>
-            <a:ext cx="3493008" cy="855878"/>
-          </a:xfrm>
-          <a:prstGeom prst="rect">
-            <a:avLst/>
-          </a:prstGeom>
-          <a:noFill/>
-          <a:ln/>
-        </p:spPr>
-        <p:txBody>
-          <a:bodyPr wrap="square" rtlCol="0" anchor="ctr"/>
-          <a:lstStyle/>
-          <a:p>
-            <a:pPr algn="ctr" indent="0" marL="0">
-              <a:buNone/>
-            </a:pPr>
-            <a:r>
-              <a:rPr lang="en-US" sz="2600" b="1" dirty="0">
-                <a:solidFill>
-                  <a:srgbClr val="1B2E5E"/>
-                </a:solidFill>
-                <a:latin typeface="Cambria" pitchFamily="34" charset="0"/>
-                <a:ea typeface="Cambria" pitchFamily="34" charset="-122"/>
-                <a:cs typeface="Cambria" pitchFamily="34" charset="-120"/>
-              </a:rPr>
-              <a:t>$102K</a:t>
-            </a:r>
-            <a:endParaRPr lang="en-US" sz="2600" dirty="0"/>
-          </a:p>
-        </p:txBody>
-      </p:sp>
-      <p:sp>
-        <p:nvSpPr>
-          <p:cNvPr id="14" name="Text 12"/>
-          <p:cNvSpPr txBox="1"/>
-          <p:nvPr/>
-        </p:nvSpPr>
-        <p:spPr>
-          <a:xfrm>
-            <a:off x="8065008" y="1869034"/>
-            <a:ext cx="3547872" cy="691286"/>
-          </a:xfrm>
-          <a:prstGeom prst="rect">
-            <a:avLst/>
-          </a:prstGeom>
-          <a:noFill/>
-          <a:ln/>
-        </p:spPr>
-        <p:txBody>
-          <a:bodyPr wrap="square" rtlCol="0" anchor="ctr"/>
-          <a:lstStyle/>
-          <a:p>
-            <a:pPr algn="ctr" indent="0" marL="0">
-              <a:buNone/>
-            </a:pPr>
-            <a:r>
-              <a:rPr lang="en-US" sz="1000" dirty="0">
-                <a:solidFill>
-                  <a:srgbClr val="4B5563"/>
-                </a:solidFill>
-                <a:latin typeface="Calibri" pitchFamily="34" charset="0"/>
-                <a:ea typeface="Calibri" pitchFamily="34" charset="-122"/>
-                <a:cs typeface="Calibri" pitchFamily="34" charset="-120"/>
-              </a:rPr>
-              <a:t>Tiene pedido · 20 SKUs</a:t>
-            </a:r>
-            <a:endParaRPr lang="en-US" sz="1000" dirty="0"/>
-          </a:p>
-          <a:p>
-            <a:pPr algn="ctr" indent="0" marL="0">
-              <a:buNone/>
-            </a:pPr>
-            <a:r>
-              <a:rPr lang="en-US" sz="1000" dirty="0">
-                <a:solidFill>
-                  <a:srgbClr val="4B5563"/>
-                </a:solidFill>
-                <a:latin typeface="Calibri" pitchFamily="34" charset="0"/>
-                <a:ea typeface="Calibri" pitchFamily="34" charset="-122"/>
-                <a:cs typeface="Calibri" pitchFamily="34" charset="-120"/>
-              </a:rPr>
-              <a:t>Margen prom. 36.1%</a:t>
-            </a:r>
-            <a:endParaRPr lang="en-US" sz="1000" dirty="0"/>
-          </a:p>
-        </p:txBody>
-      </p:sp>
-      <p:sp>
-        <p:nvSpPr>
-          <p:cNvPr id="15" name="Shape 13"/>
-          <p:cNvSpPr/>
-          <p:nvPr/>
-        </p:nvSpPr>
-        <p:spPr>
-          <a:xfrm>
-            <a:off x="457200" y="2788920"/>
-            <a:ext cx="3474720" cy="3474720"/>
-          </a:xfrm>
-          <a:prstGeom prst="roundRect">
-            <a:avLst>
-              <a:gd name="adj" fmla="val 1842"/>
-            </a:avLst>
-          </a:prstGeom>
-          <a:solidFill>
-            <a:srgbClr val="FFFFFF"/>
-          </a:solidFill>
-          <a:ln w="12700">
-            <a:solidFill>
-              <a:srgbClr val="E5E7EB"/>
-            </a:solidFill>
-            <a:prstDash val="solid"/>
-          </a:ln>
-        </p:spPr>
-      </p:sp>
-      <p:sp>
-        <p:nvSpPr>
-          <p:cNvPr id="16" name="Shape 14"/>
-          <p:cNvSpPr/>
-          <p:nvPr/>
-        </p:nvSpPr>
-        <p:spPr>
-          <a:xfrm>
-            <a:off x="457200" y="2788920"/>
-            <a:ext cx="64008" cy="3474720"/>
-          </a:xfrm>
-          <a:prstGeom prst="rect">
-            <a:avLst/>
-          </a:prstGeom>
-          <a:solidFill>
-            <a:srgbClr val="22A45D"/>
-          </a:solidFill>
-          <a:ln w="12700">
-            <a:solidFill>
-              <a:srgbClr val="22A45D"/>
-            </a:solidFill>
-            <a:prstDash val="solid"/>
-          </a:ln>
-        </p:spPr>
-      </p:sp>
-      <p:sp>
-        <p:nvSpPr>
-          <p:cNvPr id="17" name="Text 15"/>
-          <p:cNvSpPr txBox="1"/>
-          <p:nvPr/>
-        </p:nvSpPr>
-        <p:spPr>
-          <a:xfrm>
-            <a:off x="640080" y="2926080"/>
-            <a:ext cx="3200400" cy="411480"/>
-          </a:xfrm>
-          <a:prstGeom prst="rect">
-            <a:avLst/>
-          </a:prstGeom>
-          <a:noFill/>
-          <a:ln/>
-        </p:spPr>
-        <p:txBody>
-          <a:bodyPr wrap="square" rtlCol="0" anchor="ctr"/>
-          <a:lstStyle/>
-          <a:p>
-            <a:pPr indent="0" marL="0">
-              <a:buNone/>
-            </a:pPr>
-            <a:r>
-              <a:rPr lang="en-US" sz="1300" b="1" dirty="0">
-                <a:solidFill>
-                  <a:srgbClr val="22A45D"/>
-                </a:solidFill>
-                <a:latin typeface="Calibri" pitchFamily="34" charset="0"/>
-                <a:ea typeface="Calibri" pitchFamily="34" charset="-122"/>
-                <a:cs typeface="Calibri" pitchFamily="34" charset="-120"/>
-              </a:rPr>
-              <a:t>COMPRAR</a:t>
-            </a:r>
-            <a:endParaRPr lang="en-US" sz="1300" dirty="0"/>
-          </a:p>
-        </p:txBody>
-      </p:sp>
-      <p:sp>
-        <p:nvSpPr>
-          <p:cNvPr id="18" name="Text 16"/>
-          <p:cNvSpPr txBox="1"/>
-          <p:nvPr/>
-        </p:nvSpPr>
-        <p:spPr>
-          <a:xfrm>
-            <a:off x="621792" y="3401568"/>
-            <a:ext cx="3200400" cy="2651760"/>
-          </a:xfrm>
-          <a:prstGeom prst="rect">
-            <a:avLst/>
-          </a:prstGeom>
-          <a:noFill/>
-          <a:ln/>
-        </p:spPr>
-        <p:txBody>
-          <a:bodyPr wrap="square" rtlCol="0" anchor="ctr"/>
-          <a:lstStyle/>
-          <a:p>
-            <a:pPr indent="0" marL="0">
-              <a:buNone/>
-            </a:pPr>
-            <a:r>
-              <a:rPr lang="en-US" sz="1100" dirty="0">
-                <a:solidFill>
-                  <a:srgbClr val="4B5563"/>
-                </a:solidFill>
-                <a:latin typeface="Calibri" pitchFamily="34" charset="0"/>
-                <a:ea typeface="Calibri" pitchFamily="34" charset="-122"/>
-                <a:cs typeface="Calibri" pitchFamily="34" charset="-120"/>
-              </a:rPr>
-              <a:t>Productos de mayor rotacion. El stock actual dura menos de 180 dias. Hay que reponer para no perder ventas. Son los de mejor margen del portfolio.</a:t>
-            </a:r>
-            <a:endParaRPr lang="en-US" sz="1100" dirty="0"/>
-          </a:p>
-        </p:txBody>
-      </p:sp>
-      <p:sp>
-        <p:nvSpPr>
-          <p:cNvPr id="19" name="Shape 17"/>
-          <p:cNvSpPr/>
-          <p:nvPr/>
-        </p:nvSpPr>
-        <p:spPr>
-          <a:xfrm>
-            <a:off x="4206240" y="2788920"/>
-            <a:ext cx="3474720" cy="3474720"/>
-          </a:xfrm>
-          <a:prstGeom prst="roundRect">
-            <a:avLst>
-              <a:gd name="adj" fmla="val 1842"/>
-            </a:avLst>
-          </a:prstGeom>
-          <a:solidFill>
-            <a:srgbClr val="FFFFFF"/>
-          </a:solidFill>
-          <a:ln w="12700">
-            <a:solidFill>
-              <a:srgbClr val="E5E7EB"/>
-            </a:solidFill>
-            <a:prstDash val="solid"/>
-          </a:ln>
-        </p:spPr>
-      </p:sp>
-      <p:sp>
-        <p:nvSpPr>
-          <p:cNvPr id="20" name="Shape 18"/>
-          <p:cNvSpPr/>
-          <p:nvPr/>
-        </p:nvSpPr>
-        <p:spPr>
-          <a:xfrm>
-            <a:off x="4206240" y="2788920"/>
-            <a:ext cx="64008" cy="3474720"/>
-          </a:xfrm>
-          <a:prstGeom prst="rect">
-            <a:avLst/>
-          </a:prstGeom>
-          <a:solidFill>
-            <a:srgbClr val="3B7DD8"/>
-          </a:solidFill>
-          <a:ln w="12700">
-            <a:solidFill>
-              <a:srgbClr val="3B7DD8"/>
-            </a:solidFill>
-            <a:prstDash val="solid"/>
-          </a:ln>
-        </p:spPr>
-      </p:sp>
-      <p:sp>
-        <p:nvSpPr>
-          <p:cNvPr id="21" name="Text 19"/>
-          <p:cNvSpPr txBox="1"/>
-          <p:nvPr/>
-        </p:nvSpPr>
-        <p:spPr>
-          <a:xfrm>
-            <a:off x="4389120" y="2926080"/>
-            <a:ext cx="3200400" cy="411480"/>
-          </a:xfrm>
-          <a:prstGeom prst="rect">
-            <a:avLst/>
-          </a:prstGeom>
-          <a:noFill/>
-          <a:ln/>
-        </p:spPr>
-        <p:txBody>
-          <a:bodyPr wrap="square" rtlCol="0" anchor="ctr"/>
-          <a:lstStyle/>
-          <a:p>
-            <a:pPr indent="0" marL="0">
-              <a:buNone/>
-            </a:pPr>
-            <a:r>
-              <a:rPr lang="en-US" sz="1300" b="1" dirty="0">
-                <a:solidFill>
-                  <a:srgbClr val="3B7DD8"/>
-                </a:solidFill>
-                <a:latin typeface="Calibri" pitchFamily="34" charset="0"/>
-                <a:ea typeface="Calibri" pitchFamily="34" charset="-122"/>
-                <a:cs typeface="Calibri" pitchFamily="34" charset="-120"/>
-              </a:rPr>
-              <a:t>RECIEN INGRESADO</a:t>
-            </a:r>
-            <a:endParaRPr lang="en-US" sz="1300" dirty="0"/>
-          </a:p>
-        </p:txBody>
-      </p:sp>
-      <p:sp>
-        <p:nvSpPr>
-          <p:cNvPr id="22" name="Text 20"/>
-          <p:cNvSpPr txBox="1"/>
-          <p:nvPr/>
-        </p:nvSpPr>
-        <p:spPr>
-          <a:xfrm>
-            <a:off x="4370832" y="3401568"/>
-            <a:ext cx="3200400" cy="2651760"/>
-          </a:xfrm>
-          <a:prstGeom prst="rect">
-            <a:avLst/>
-          </a:prstGeom>
-          <a:noFill/>
-          <a:ln/>
-        </p:spPr>
-        <p:txBody>
-          <a:bodyPr wrap="square" rtlCol="0" anchor="ctr"/>
-          <a:lstStyle/>
-          <a:p>
-            <a:pPr indent="0" marL="0">
-              <a:buNone/>
-            </a:pPr>
-            <a:r>
-              <a:rPr lang="en-US" sz="1100" dirty="0">
-                <a:solidFill>
-                  <a:srgbClr val="4B5563"/>
-                </a:solidFill>
-                <a:latin typeface="Calibri" pitchFamily="34" charset="0"/>
-                <a:ea typeface="Calibri" pitchFamily="34" charset="-122"/>
-                <a:cs typeface="Calibri" pitchFamily="34" charset="-120"/>
-              </a:rPr>
-              <a:t>Productos con compra registrada reciente. La rotacion todavia no se puede medir con precision. Monitorear en los proximos 60-90 dias.</a:t>
-            </a:r>
-            <a:endParaRPr lang="en-US" sz="1100" dirty="0"/>
-          </a:p>
-        </p:txBody>
-      </p:sp>
-      <p:sp>
-        <p:nvSpPr>
-          <p:cNvPr id="23" name="Shape 21"/>
-          <p:cNvSpPr/>
-          <p:nvPr/>
-        </p:nvSpPr>
-        <p:spPr>
-          <a:xfrm>
-            <a:off x="7955280" y="2788920"/>
-            <a:ext cx="3474720" cy="3474720"/>
-          </a:xfrm>
-          <a:prstGeom prst="roundRect">
-            <a:avLst>
-              <a:gd name="adj" fmla="val 1842"/>
-            </a:avLst>
-          </a:prstGeom>
-          <a:solidFill>
-            <a:srgbClr val="FFFFFF"/>
-          </a:solidFill>
-          <a:ln w="12700">
-            <a:solidFill>
-              <a:srgbClr val="E5E7EB"/>
-            </a:solidFill>
-            <a:prstDash val="solid"/>
-          </a:ln>
-        </p:spPr>
-      </p:sp>
-      <p:sp>
-        <p:nvSpPr>
-          <p:cNvPr id="24" name="Shape 22"/>
-          <p:cNvSpPr/>
-          <p:nvPr/>
-        </p:nvSpPr>
-        <p:spPr>
-          <a:xfrm>
-            <a:off x="7955280" y="2788920"/>
-            <a:ext cx="64008" cy="3474720"/>
-          </a:xfrm>
-          <a:prstGeom prst="rect">
-            <a:avLst/>
-          </a:prstGeom>
-          <a:solidFill>
-            <a:srgbClr val="7C3AED"/>
-          </a:solidFill>
-          <a:ln w="12700">
-            <a:solidFill>
-              <a:srgbClr val="7C3AED"/>
-            </a:solidFill>
-            <a:prstDash val="solid"/>
-          </a:ln>
-        </p:spPr>
-      </p:sp>
-      <p:sp>
-        <p:nvSpPr>
-          <p:cNvPr id="25" name="Text 23"/>
-          <p:cNvSpPr txBox="1"/>
-          <p:nvPr/>
-        </p:nvSpPr>
-        <p:spPr>
-          <a:xfrm>
-            <a:off x="8138160" y="2926080"/>
-            <a:ext cx="3200400" cy="411480"/>
-          </a:xfrm>
-          <a:prstGeom prst="rect">
-            <a:avLst/>
-          </a:prstGeom>
-          <a:noFill/>
-          <a:ln/>
-        </p:spPr>
-        <p:txBody>
-          <a:bodyPr wrap="square" rtlCol="0" anchor="ctr"/>
-          <a:lstStyle/>
-          <a:p>
-            <a:pPr indent="0" marL="0">
-              <a:buNone/>
-            </a:pPr>
-            <a:r>
-              <a:rPr lang="en-US" sz="1300" b="1" dirty="0">
-                <a:solidFill>
-                  <a:srgbClr val="7C3AED"/>
-                </a:solidFill>
-                <a:latin typeface="Calibri" pitchFamily="34" charset="0"/>
-                <a:ea typeface="Calibri" pitchFamily="34" charset="-122"/>
-                <a:cs typeface="Calibri" pitchFamily="34" charset="-120"/>
-              </a:rPr>
-              <a:t>TIENE PEDIDO</a:t>
-            </a:r>
-            <a:endParaRPr lang="en-US" sz="1300" dirty="0"/>
-          </a:p>
-        </p:txBody>
-      </p:sp>
-      <p:sp>
-        <p:nvSpPr>
-          <p:cNvPr id="26" name="Text 24"/>
-          <p:cNvSpPr txBox="1"/>
-          <p:nvPr/>
-        </p:nvSpPr>
-        <p:spPr>
-          <a:xfrm>
-            <a:off x="8119872" y="3401568"/>
-            <a:ext cx="3200400" cy="2651760"/>
-          </a:xfrm>
-          <a:prstGeom prst="rect">
-            <a:avLst/>
-          </a:prstGeom>
-          <a:noFill/>
-          <a:ln/>
-        </p:spPr>
-        <p:txBody>
-          <a:bodyPr wrap="square" rtlCol="0" anchor="ctr"/>
-          <a:lstStyle/>
-          <a:p>
-            <a:pPr indent="0" marL="0">
-              <a:buNone/>
-            </a:pPr>
-            <a:r>
-              <a:rPr lang="en-US" sz="1100" dirty="0">
-                <a:solidFill>
-                  <a:srgbClr val="4B5563"/>
-                </a:solidFill>
-                <a:latin typeface="Calibri" pitchFamily="34" charset="0"/>
-                <a:ea typeface="Calibri" pitchFamily="34" charset="-122"/>
-                <a:cs typeface="Calibri" pitchFamily="34" charset="-120"/>
-              </a:rPr>
-              <a:t>Ya tienen un requerimiento confirmado en camino. El stock actual puede estar bajo pero hay reposicion en curso.</a:t>
-            </a:r>
-            <a:endParaRPr lang="en-US" sz="1100" dirty="0"/>
           </a:p>
         </p:txBody>
       </p:sp>
